--- a/college/report/Project-III-Presentation-Smart-Helpdesk.pptx
+++ b/college/report/Project-III-Presentation-Smart-Helpdesk.pptx
@@ -2636,7 +2636,7 @@
                 <a:ea typeface="Georgia" pitchFamily="34" charset="-122"/>
                 <a:cs typeface="Georgia" pitchFamily="34" charset="-120"/>
               </a:rPr>
-              <a:t>Priority Scoring and Agent Assignment</a:t>
+              <a:t>Algorithms (1/2)</a:t>
             </a:r>
             <a:endParaRPr lang="en-US" sz="2800" dirty="0"/>
           </a:p>
@@ -2801,1126 +2801,9 @@
                 <a:ea typeface="Georgia" pitchFamily="34" charset="-122"/>
                 <a:cs typeface="Georgia" pitchFamily="34" charset="-120"/>
               </a:rPr>
-              <a:t>Weighted priority score</a:t>
+              <a:t>Priority scoring</a:t>
             </a:r>
             <a:endParaRPr lang="en-US" sz="1800" dirty="0"/>
-          </a:p>
-        </p:txBody>
-      </p:sp>
-      <p:graphicFrame>
-        <p:nvGraphicFramePr>
-          <p:cNvPr id="11" name="Table 0"/>
-          <p:cNvGraphicFramePr>
-            <a:graphicFrameLocks noGrp="1"/>
-          </p:cNvGraphicFramePr>
-          <p:nvPr>
-            <p:extLst>
-              <p:ext uri="{D42A27DB-BD31-4B8C-83A1-F6EECF244321}">
-                <p14:modId xmlns:p14="http://schemas.microsoft.com/office/powerpoint/2010/main" val="1579011935"/>
-              </p:ext>
-            </p:extLst>
-          </p:nvPr>
-        </p:nvGraphicFramePr>
-        <p:xfrm>
-          <a:off x="548640" y="1783080"/>
-          <a:ext cx="5394960" cy="914400"/>
-        </p:xfrm>
-        <a:graphic>
-          <a:graphicData uri="http://schemas.openxmlformats.org/drawingml/2006/table">
-            <a:tbl>
-              <a:tblPr/>
-              <a:tblGrid>
-                <a:gridCol w="1463040"/>
-                <a:gridCol w="3108960"/>
-                <a:gridCol w="822960"/>
-              </a:tblGrid>
-              <a:tr h="329184">
-                <a:tc>
-                  <a:txBody>
-                    <a:bodyPr/>
-                    <a:lstStyle/>
-                    <a:p>
-                      <a:pPr indent="0" marL="0">
-                        <a:buNone/>
-                      </a:pPr>
-                      <a:r>
-                        <a:rPr lang="en-US" sz="1250" b="1" dirty="0">
-                          <a:solidFill>
-                            <a:srgbClr val="FFFFFF"/>
-                          </a:solidFill>
-                          <a:latin typeface="Calibri" pitchFamily="34" charset="0"/>
-                          <a:ea typeface="Calibri" pitchFamily="34" charset="-122"/>
-                          <a:cs typeface="Calibri" pitchFamily="34" charset="-120"/>
-                        </a:rPr>
-                        <a:t>Input</a:t>
-                      </a:r>
-                      <a:endParaRPr lang="en-US" sz="1250" dirty="0">
-                        <a:latin typeface="Calibri" charset="0"/>
-                        <a:ea typeface="Calibri" charset="0"/>
-                        <a:cs typeface="Calibri" charset="0"/>
-                      </a:endParaRPr>
-                    </a:p>
-                  </a:txBody>
-                  <a:tcPr marL="76200" marR="76200" marT="25400" marB="25400" anchor="ctr">
-                    <a:lnL w="9525" cap="flat" cmpd="sng" algn="ctr">
-                      <a:solidFill>
-                        <a:srgbClr val="D5DAE1"/>
-                      </a:solidFill>
-                      <a:prstDash val="solid"/>
-                      <a:round/>
-                      <a:headEnd type="none" w="med" len="med"/>
-                      <a:tailEnd type="none" w="med" len="med"/>
-                    </a:lnL>
-                    <a:lnR w="9525" cap="flat" cmpd="sng" algn="ctr">
-                      <a:solidFill>
-                        <a:srgbClr val="D5DAE1"/>
-                      </a:solidFill>
-                      <a:prstDash val="solid"/>
-                      <a:round/>
-                      <a:headEnd type="none" w="med" len="med"/>
-                      <a:tailEnd type="none" w="med" len="med"/>
-                    </a:lnR>
-                    <a:lnT w="9525" cap="flat" cmpd="sng" algn="ctr">
-                      <a:solidFill>
-                        <a:srgbClr val="D5DAE1"/>
-                      </a:solidFill>
-                      <a:prstDash val="solid"/>
-                      <a:round/>
-                      <a:headEnd type="none" w="med" len="med"/>
-                      <a:tailEnd type="none" w="med" len="med"/>
-                    </a:lnT>
-                    <a:lnB w="9525" cap="flat" cmpd="sng" algn="ctr">
-                      <a:solidFill>
-                        <a:srgbClr val="D5DAE1"/>
-                      </a:solidFill>
-                      <a:prstDash val="solid"/>
-                      <a:round/>
-                      <a:headEnd type="none" w="med" len="med"/>
-                      <a:tailEnd type="none" w="med" len="med"/>
-                    </a:lnB>
-                    <a:solidFill>
-                      <a:srgbClr val="14213D"/>
-                    </a:solidFill>
-                  </a:tcPr>
-                </a:tc>
-                <a:tc>
-                  <a:txBody>
-                    <a:bodyPr/>
-                    <a:lstStyle/>
-                    <a:p>
-                      <a:pPr indent="0" marL="0">
-                        <a:buNone/>
-                      </a:pPr>
-                      <a:r>
-                        <a:rPr lang="en-US" sz="1250" b="1" dirty="0">
-                          <a:solidFill>
-                            <a:srgbClr val="FFFFFF"/>
-                          </a:solidFill>
-                          <a:latin typeface="Calibri" pitchFamily="34" charset="0"/>
-                          <a:ea typeface="Calibri" pitchFamily="34" charset="-122"/>
-                          <a:cs typeface="Calibri" pitchFamily="34" charset="-120"/>
-                        </a:rPr>
-                        <a:t>Scaled to 0–1</a:t>
-                      </a:r>
-                      <a:endParaRPr lang="en-US" sz="1250" dirty="0">
-                        <a:latin typeface="Calibri" charset="0"/>
-                        <a:ea typeface="Calibri" charset="0"/>
-                        <a:cs typeface="Calibri" charset="0"/>
-                      </a:endParaRPr>
-                    </a:p>
-                  </a:txBody>
-                  <a:tcPr marL="76200" marR="76200" marT="25400" marB="25400" anchor="ctr">
-                    <a:lnL w="9525" cap="flat" cmpd="sng" algn="ctr">
-                      <a:solidFill>
-                        <a:srgbClr val="D5DAE1"/>
-                      </a:solidFill>
-                      <a:prstDash val="solid"/>
-                      <a:round/>
-                      <a:headEnd type="none" w="med" len="med"/>
-                      <a:tailEnd type="none" w="med" len="med"/>
-                    </a:lnL>
-                    <a:lnR w="9525" cap="flat" cmpd="sng" algn="ctr">
-                      <a:solidFill>
-                        <a:srgbClr val="D5DAE1"/>
-                      </a:solidFill>
-                      <a:prstDash val="solid"/>
-                      <a:round/>
-                      <a:headEnd type="none" w="med" len="med"/>
-                      <a:tailEnd type="none" w="med" len="med"/>
-                    </a:lnR>
-                    <a:lnT w="9525" cap="flat" cmpd="sng" algn="ctr">
-                      <a:solidFill>
-                        <a:srgbClr val="D5DAE1"/>
-                      </a:solidFill>
-                      <a:prstDash val="solid"/>
-                      <a:round/>
-                      <a:headEnd type="none" w="med" len="med"/>
-                      <a:tailEnd type="none" w="med" len="med"/>
-                    </a:lnT>
-                    <a:lnB w="9525" cap="flat" cmpd="sng" algn="ctr">
-                      <a:solidFill>
-                        <a:srgbClr val="D5DAE1"/>
-                      </a:solidFill>
-                      <a:prstDash val="solid"/>
-                      <a:round/>
-                      <a:headEnd type="none" w="med" len="med"/>
-                      <a:tailEnd type="none" w="med" len="med"/>
-                    </a:lnB>
-                    <a:solidFill>
-                      <a:srgbClr val="14213D"/>
-                    </a:solidFill>
-                  </a:tcPr>
-                </a:tc>
-                <a:tc>
-                  <a:txBody>
-                    <a:bodyPr/>
-                    <a:lstStyle/>
-                    <a:p>
-                      <a:pPr indent="0" marL="0">
-                        <a:buNone/>
-                      </a:pPr>
-                      <a:r>
-                        <a:rPr lang="en-US" sz="1250" b="1" dirty="0">
-                          <a:solidFill>
-                            <a:srgbClr val="FFFFFF"/>
-                          </a:solidFill>
-                          <a:latin typeface="Calibri" pitchFamily="34" charset="0"/>
-                          <a:ea typeface="Calibri" pitchFamily="34" charset="-122"/>
-                          <a:cs typeface="Calibri" pitchFamily="34" charset="-120"/>
-                        </a:rPr>
-                        <a:t>Weight</a:t>
-                      </a:r>
-                      <a:endParaRPr lang="en-US" sz="1250" dirty="0">
-                        <a:latin typeface="Calibri" charset="0"/>
-                        <a:ea typeface="Calibri" charset="0"/>
-                        <a:cs typeface="Calibri" charset="0"/>
-                      </a:endParaRPr>
-                    </a:p>
-                  </a:txBody>
-                  <a:tcPr marL="76200" marR="76200" marT="25400" marB="25400" anchor="ctr">
-                    <a:lnL w="9525" cap="flat" cmpd="sng" algn="ctr">
-                      <a:solidFill>
-                        <a:srgbClr val="D5DAE1"/>
-                      </a:solidFill>
-                      <a:prstDash val="solid"/>
-                      <a:round/>
-                      <a:headEnd type="none" w="med" len="med"/>
-                      <a:tailEnd type="none" w="med" len="med"/>
-                    </a:lnL>
-                    <a:lnR w="9525" cap="flat" cmpd="sng" algn="ctr">
-                      <a:solidFill>
-                        <a:srgbClr val="D5DAE1"/>
-                      </a:solidFill>
-                      <a:prstDash val="solid"/>
-                      <a:round/>
-                      <a:headEnd type="none" w="med" len="med"/>
-                      <a:tailEnd type="none" w="med" len="med"/>
-                    </a:lnR>
-                    <a:lnT w="9525" cap="flat" cmpd="sng" algn="ctr">
-                      <a:solidFill>
-                        <a:srgbClr val="D5DAE1"/>
-                      </a:solidFill>
-                      <a:prstDash val="solid"/>
-                      <a:round/>
-                      <a:headEnd type="none" w="med" len="med"/>
-                      <a:tailEnd type="none" w="med" len="med"/>
-                    </a:lnT>
-                    <a:lnB w="9525" cap="flat" cmpd="sng" algn="ctr">
-                      <a:solidFill>
-                        <a:srgbClr val="D5DAE1"/>
-                      </a:solidFill>
-                      <a:prstDash val="solid"/>
-                      <a:round/>
-                      <a:headEnd type="none" w="med" len="med"/>
-                      <a:tailEnd type="none" w="med" len="med"/>
-                    </a:lnB>
-                    <a:solidFill>
-                      <a:srgbClr val="14213D"/>
-                    </a:solidFill>
-                  </a:tcPr>
-                </a:tc>
-              </a:tr>
-              <a:tr h="329184">
-                <a:tc>
-                  <a:txBody>
-                    <a:bodyPr/>
-                    <a:lstStyle/>
-                    <a:p>
-                      <a:pPr indent="0" marL="0">
-                        <a:buNone/>
-                      </a:pPr>
-                      <a:r>
-                        <a:rPr lang="en-US" sz="1250" dirty="0">
-                          <a:solidFill>
-                            <a:srgbClr val="26303F"/>
-                          </a:solidFill>
-                          <a:latin typeface="Calibri" pitchFamily="34" charset="0"/>
-                          <a:ea typeface="Calibri" pitchFamily="34" charset="-122"/>
-                          <a:cs typeface="Calibri" pitchFamily="34" charset="-120"/>
-                        </a:rPr>
-                        <a:t>Impact (1–4)</a:t>
-                      </a:r>
-                      <a:endParaRPr lang="en-US" sz="1250" dirty="0">
-                        <a:latin typeface="Calibri" charset="0"/>
-                        <a:ea typeface="Calibri" charset="0"/>
-                        <a:cs typeface="Calibri" charset="0"/>
-                      </a:endParaRPr>
-                    </a:p>
-                  </a:txBody>
-                  <a:tcPr marL="76200" marR="76200" marT="25400" marB="25400" anchor="ctr">
-                    <a:lnL w="9525" cap="flat" cmpd="sng" algn="ctr">
-                      <a:solidFill>
-                        <a:srgbClr val="D5DAE1"/>
-                      </a:solidFill>
-                      <a:prstDash val="solid"/>
-                      <a:round/>
-                      <a:headEnd type="none" w="med" len="med"/>
-                      <a:tailEnd type="none" w="med" len="med"/>
-                    </a:lnL>
-                    <a:lnR w="9525" cap="flat" cmpd="sng" algn="ctr">
-                      <a:solidFill>
-                        <a:srgbClr val="D5DAE1"/>
-                      </a:solidFill>
-                      <a:prstDash val="solid"/>
-                      <a:round/>
-                      <a:headEnd type="none" w="med" len="med"/>
-                      <a:tailEnd type="none" w="med" len="med"/>
-                    </a:lnR>
-                    <a:lnT w="9525" cap="flat" cmpd="sng" algn="ctr">
-                      <a:solidFill>
-                        <a:srgbClr val="D5DAE1"/>
-                      </a:solidFill>
-                      <a:prstDash val="solid"/>
-                      <a:round/>
-                      <a:headEnd type="none" w="med" len="med"/>
-                      <a:tailEnd type="none" w="med" len="med"/>
-                    </a:lnT>
-                    <a:lnB w="9525" cap="flat" cmpd="sng" algn="ctr">
-                      <a:solidFill>
-                        <a:srgbClr val="D5DAE1"/>
-                      </a:solidFill>
-                      <a:prstDash val="solid"/>
-                      <a:round/>
-                      <a:headEnd type="none" w="med" len="med"/>
-                      <a:tailEnd type="none" w="med" len="med"/>
-                    </a:lnB>
-                    <a:solidFill>
-                      <a:srgbClr val="FFFFFF"/>
-                    </a:solidFill>
-                  </a:tcPr>
-                </a:tc>
-                <a:tc>
-                  <a:txBody>
-                    <a:bodyPr/>
-                    <a:lstStyle/>
-                    <a:p>
-                      <a:pPr indent="0" marL="0">
-                        <a:buNone/>
-                      </a:pPr>
-                      <a:r>
-                        <a:rPr lang="en-US" sz="1250" dirty="0">
-                          <a:solidFill>
-                            <a:srgbClr val="26303F"/>
-                          </a:solidFill>
-                          <a:latin typeface="Calibri" pitchFamily="34" charset="0"/>
-                          <a:ea typeface="Calibri" pitchFamily="34" charset="-122"/>
-                          <a:cs typeface="Calibri" pitchFamily="34" charset="-120"/>
-                        </a:rPr>
-                        <a:t>(impact − 1) ÷ 3</a:t>
-                      </a:r>
-                      <a:endParaRPr lang="en-US" sz="1250" dirty="0">
-                        <a:latin typeface="Calibri" charset="0"/>
-                        <a:ea typeface="Calibri" charset="0"/>
-                        <a:cs typeface="Calibri" charset="0"/>
-                      </a:endParaRPr>
-                    </a:p>
-                  </a:txBody>
-                  <a:tcPr marL="76200" marR="76200" marT="25400" marB="25400" anchor="ctr">
-                    <a:lnL w="9525" cap="flat" cmpd="sng" algn="ctr">
-                      <a:solidFill>
-                        <a:srgbClr val="D5DAE1"/>
-                      </a:solidFill>
-                      <a:prstDash val="solid"/>
-                      <a:round/>
-                      <a:headEnd type="none" w="med" len="med"/>
-                      <a:tailEnd type="none" w="med" len="med"/>
-                    </a:lnL>
-                    <a:lnR w="9525" cap="flat" cmpd="sng" algn="ctr">
-                      <a:solidFill>
-                        <a:srgbClr val="D5DAE1"/>
-                      </a:solidFill>
-                      <a:prstDash val="solid"/>
-                      <a:round/>
-                      <a:headEnd type="none" w="med" len="med"/>
-                      <a:tailEnd type="none" w="med" len="med"/>
-                    </a:lnR>
-                    <a:lnT w="9525" cap="flat" cmpd="sng" algn="ctr">
-                      <a:solidFill>
-                        <a:srgbClr val="D5DAE1"/>
-                      </a:solidFill>
-                      <a:prstDash val="solid"/>
-                      <a:round/>
-                      <a:headEnd type="none" w="med" len="med"/>
-                      <a:tailEnd type="none" w="med" len="med"/>
-                    </a:lnT>
-                    <a:lnB w="9525" cap="flat" cmpd="sng" algn="ctr">
-                      <a:solidFill>
-                        <a:srgbClr val="D5DAE1"/>
-                      </a:solidFill>
-                      <a:prstDash val="solid"/>
-                      <a:round/>
-                      <a:headEnd type="none" w="med" len="med"/>
-                      <a:tailEnd type="none" w="med" len="med"/>
-                    </a:lnB>
-                    <a:solidFill>
-                      <a:srgbClr val="FFFFFF"/>
-                    </a:solidFill>
-                  </a:tcPr>
-                </a:tc>
-                <a:tc>
-                  <a:txBody>
-                    <a:bodyPr/>
-                    <a:lstStyle/>
-                    <a:p>
-                      <a:pPr indent="0" marL="0">
-                        <a:buNone/>
-                      </a:pPr>
-                      <a:r>
-                        <a:rPr lang="en-US" sz="1250" dirty="0">
-                          <a:solidFill>
-                            <a:srgbClr val="26303F"/>
-                          </a:solidFill>
-                          <a:latin typeface="Calibri" pitchFamily="34" charset="0"/>
-                          <a:ea typeface="Calibri" pitchFamily="34" charset="-122"/>
-                          <a:cs typeface="Calibri" pitchFamily="34" charset="-120"/>
-                        </a:rPr>
-                        <a:t>0.40</a:t>
-                      </a:r>
-                      <a:endParaRPr lang="en-US" sz="1250" dirty="0">
-                        <a:latin typeface="Calibri" charset="0"/>
-                        <a:ea typeface="Calibri" charset="0"/>
-                        <a:cs typeface="Calibri" charset="0"/>
-                      </a:endParaRPr>
-                    </a:p>
-                  </a:txBody>
-                  <a:tcPr marL="76200" marR="76200" marT="25400" marB="25400" anchor="ctr">
-                    <a:lnL w="9525" cap="flat" cmpd="sng" algn="ctr">
-                      <a:solidFill>
-                        <a:srgbClr val="D5DAE1"/>
-                      </a:solidFill>
-                      <a:prstDash val="solid"/>
-                      <a:round/>
-                      <a:headEnd type="none" w="med" len="med"/>
-                      <a:tailEnd type="none" w="med" len="med"/>
-                    </a:lnL>
-                    <a:lnR w="9525" cap="flat" cmpd="sng" algn="ctr">
-                      <a:solidFill>
-                        <a:srgbClr val="D5DAE1"/>
-                      </a:solidFill>
-                      <a:prstDash val="solid"/>
-                      <a:round/>
-                      <a:headEnd type="none" w="med" len="med"/>
-                      <a:tailEnd type="none" w="med" len="med"/>
-                    </a:lnR>
-                    <a:lnT w="9525" cap="flat" cmpd="sng" algn="ctr">
-                      <a:solidFill>
-                        <a:srgbClr val="D5DAE1"/>
-                      </a:solidFill>
-                      <a:prstDash val="solid"/>
-                      <a:round/>
-                      <a:headEnd type="none" w="med" len="med"/>
-                      <a:tailEnd type="none" w="med" len="med"/>
-                    </a:lnT>
-                    <a:lnB w="9525" cap="flat" cmpd="sng" algn="ctr">
-                      <a:solidFill>
-                        <a:srgbClr val="D5DAE1"/>
-                      </a:solidFill>
-                      <a:prstDash val="solid"/>
-                      <a:round/>
-                      <a:headEnd type="none" w="med" len="med"/>
-                      <a:tailEnd type="none" w="med" len="med"/>
-                    </a:lnB>
-                    <a:solidFill>
-                      <a:srgbClr val="FFFFFF"/>
-                    </a:solidFill>
-                  </a:tcPr>
-                </a:tc>
-              </a:tr>
-              <a:tr h="329184">
-                <a:tc>
-                  <a:txBody>
-                    <a:bodyPr/>
-                    <a:lstStyle/>
-                    <a:p>
-                      <a:pPr indent="0" marL="0">
-                        <a:buNone/>
-                      </a:pPr>
-                      <a:r>
-                        <a:rPr lang="en-US" sz="1250" dirty="0">
-                          <a:solidFill>
-                            <a:srgbClr val="26303F"/>
-                          </a:solidFill>
-                          <a:latin typeface="Calibri" pitchFamily="34" charset="0"/>
-                          <a:ea typeface="Calibri" pitchFamily="34" charset="-122"/>
-                          <a:cs typeface="Calibri" pitchFamily="34" charset="-120"/>
-                        </a:rPr>
-                        <a:t>Urgency (1–4)</a:t>
-                      </a:r>
-                      <a:endParaRPr lang="en-US" sz="1250" dirty="0">
-                        <a:latin typeface="Calibri" charset="0"/>
-                        <a:ea typeface="Calibri" charset="0"/>
-                        <a:cs typeface="Calibri" charset="0"/>
-                      </a:endParaRPr>
-                    </a:p>
-                  </a:txBody>
-                  <a:tcPr marL="76200" marR="76200" marT="25400" marB="25400" anchor="ctr">
-                    <a:lnL w="9525" cap="flat" cmpd="sng" algn="ctr">
-                      <a:solidFill>
-                        <a:srgbClr val="D5DAE1"/>
-                      </a:solidFill>
-                      <a:prstDash val="solid"/>
-                      <a:round/>
-                      <a:headEnd type="none" w="med" len="med"/>
-                      <a:tailEnd type="none" w="med" len="med"/>
-                    </a:lnL>
-                    <a:lnR w="9525" cap="flat" cmpd="sng" algn="ctr">
-                      <a:solidFill>
-                        <a:srgbClr val="D5DAE1"/>
-                      </a:solidFill>
-                      <a:prstDash val="solid"/>
-                      <a:round/>
-                      <a:headEnd type="none" w="med" len="med"/>
-                      <a:tailEnd type="none" w="med" len="med"/>
-                    </a:lnR>
-                    <a:lnT w="9525" cap="flat" cmpd="sng" algn="ctr">
-                      <a:solidFill>
-                        <a:srgbClr val="D5DAE1"/>
-                      </a:solidFill>
-                      <a:prstDash val="solid"/>
-                      <a:round/>
-                      <a:headEnd type="none" w="med" len="med"/>
-                      <a:tailEnd type="none" w="med" len="med"/>
-                    </a:lnT>
-                    <a:lnB w="9525" cap="flat" cmpd="sng" algn="ctr">
-                      <a:solidFill>
-                        <a:srgbClr val="D5DAE1"/>
-                      </a:solidFill>
-                      <a:prstDash val="solid"/>
-                      <a:round/>
-                      <a:headEnd type="none" w="med" len="med"/>
-                      <a:tailEnd type="none" w="med" len="med"/>
-                    </a:lnB>
-                    <a:solidFill>
-                      <a:srgbClr val="F7F8FA"/>
-                    </a:solidFill>
-                  </a:tcPr>
-                </a:tc>
-                <a:tc>
-                  <a:txBody>
-                    <a:bodyPr/>
-                    <a:lstStyle/>
-                    <a:p>
-                      <a:pPr indent="0" marL="0">
-                        <a:buNone/>
-                      </a:pPr>
-                      <a:r>
-                        <a:rPr lang="en-US" sz="1250" dirty="0">
-                          <a:solidFill>
-                            <a:srgbClr val="26303F"/>
-                          </a:solidFill>
-                          <a:latin typeface="Calibri" pitchFamily="34" charset="0"/>
-                          <a:ea typeface="Calibri" pitchFamily="34" charset="-122"/>
-                          <a:cs typeface="Calibri" pitchFamily="34" charset="-120"/>
-                        </a:rPr>
-                        <a:t>(urgency − 1) ÷ 3</a:t>
-                      </a:r>
-                      <a:endParaRPr lang="en-US" sz="1250" dirty="0">
-                        <a:latin typeface="Calibri" charset="0"/>
-                        <a:ea typeface="Calibri" charset="0"/>
-                        <a:cs typeface="Calibri" charset="0"/>
-                      </a:endParaRPr>
-                    </a:p>
-                  </a:txBody>
-                  <a:tcPr marL="76200" marR="76200" marT="25400" marB="25400" anchor="ctr">
-                    <a:lnL w="9525" cap="flat" cmpd="sng" algn="ctr">
-                      <a:solidFill>
-                        <a:srgbClr val="D5DAE1"/>
-                      </a:solidFill>
-                      <a:prstDash val="solid"/>
-                      <a:round/>
-                      <a:headEnd type="none" w="med" len="med"/>
-                      <a:tailEnd type="none" w="med" len="med"/>
-                    </a:lnL>
-                    <a:lnR w="9525" cap="flat" cmpd="sng" algn="ctr">
-                      <a:solidFill>
-                        <a:srgbClr val="D5DAE1"/>
-                      </a:solidFill>
-                      <a:prstDash val="solid"/>
-                      <a:round/>
-                      <a:headEnd type="none" w="med" len="med"/>
-                      <a:tailEnd type="none" w="med" len="med"/>
-                    </a:lnR>
-                    <a:lnT w="9525" cap="flat" cmpd="sng" algn="ctr">
-                      <a:solidFill>
-                        <a:srgbClr val="D5DAE1"/>
-                      </a:solidFill>
-                      <a:prstDash val="solid"/>
-                      <a:round/>
-                      <a:headEnd type="none" w="med" len="med"/>
-                      <a:tailEnd type="none" w="med" len="med"/>
-                    </a:lnT>
-                    <a:lnB w="9525" cap="flat" cmpd="sng" algn="ctr">
-                      <a:solidFill>
-                        <a:srgbClr val="D5DAE1"/>
-                      </a:solidFill>
-                      <a:prstDash val="solid"/>
-                      <a:round/>
-                      <a:headEnd type="none" w="med" len="med"/>
-                      <a:tailEnd type="none" w="med" len="med"/>
-                    </a:lnB>
-                    <a:solidFill>
-                      <a:srgbClr val="F7F8FA"/>
-                    </a:solidFill>
-                  </a:tcPr>
-                </a:tc>
-                <a:tc>
-                  <a:txBody>
-                    <a:bodyPr/>
-                    <a:lstStyle/>
-                    <a:p>
-                      <a:pPr indent="0" marL="0">
-                        <a:buNone/>
-                      </a:pPr>
-                      <a:r>
-                        <a:rPr lang="en-US" sz="1250" dirty="0">
-                          <a:solidFill>
-                            <a:srgbClr val="26303F"/>
-                          </a:solidFill>
-                          <a:latin typeface="Calibri" pitchFamily="34" charset="0"/>
-                          <a:ea typeface="Calibri" pitchFamily="34" charset="-122"/>
-                          <a:cs typeface="Calibri" pitchFamily="34" charset="-120"/>
-                        </a:rPr>
-                        <a:t>0.35</a:t>
-                      </a:r>
-                      <a:endParaRPr lang="en-US" sz="1250" dirty="0">
-                        <a:latin typeface="Calibri" charset="0"/>
-                        <a:ea typeface="Calibri" charset="0"/>
-                        <a:cs typeface="Calibri" charset="0"/>
-                      </a:endParaRPr>
-                    </a:p>
-                  </a:txBody>
-                  <a:tcPr marL="76200" marR="76200" marT="25400" marB="25400" anchor="ctr">
-                    <a:lnL w="9525" cap="flat" cmpd="sng" algn="ctr">
-                      <a:solidFill>
-                        <a:srgbClr val="D5DAE1"/>
-                      </a:solidFill>
-                      <a:prstDash val="solid"/>
-                      <a:round/>
-                      <a:headEnd type="none" w="med" len="med"/>
-                      <a:tailEnd type="none" w="med" len="med"/>
-                    </a:lnL>
-                    <a:lnR w="9525" cap="flat" cmpd="sng" algn="ctr">
-                      <a:solidFill>
-                        <a:srgbClr val="D5DAE1"/>
-                      </a:solidFill>
-                      <a:prstDash val="solid"/>
-                      <a:round/>
-                      <a:headEnd type="none" w="med" len="med"/>
-                      <a:tailEnd type="none" w="med" len="med"/>
-                    </a:lnR>
-                    <a:lnT w="9525" cap="flat" cmpd="sng" algn="ctr">
-                      <a:solidFill>
-                        <a:srgbClr val="D5DAE1"/>
-                      </a:solidFill>
-                      <a:prstDash val="solid"/>
-                      <a:round/>
-                      <a:headEnd type="none" w="med" len="med"/>
-                      <a:tailEnd type="none" w="med" len="med"/>
-                    </a:lnT>
-                    <a:lnB w="9525" cap="flat" cmpd="sng" algn="ctr">
-                      <a:solidFill>
-                        <a:srgbClr val="D5DAE1"/>
-                      </a:solidFill>
-                      <a:prstDash val="solid"/>
-                      <a:round/>
-                      <a:headEnd type="none" w="med" len="med"/>
-                      <a:tailEnd type="none" w="med" len="med"/>
-                    </a:lnB>
-                    <a:solidFill>
-                      <a:srgbClr val="F7F8FA"/>
-                    </a:solidFill>
-                  </a:tcPr>
-                </a:tc>
-              </a:tr>
-              <a:tr h="329184">
-                <a:tc>
-                  <a:txBody>
-                    <a:bodyPr/>
-                    <a:lstStyle/>
-                    <a:p>
-                      <a:pPr indent="0" marL="0">
-                        <a:buNone/>
-                      </a:pPr>
-                      <a:r>
-                        <a:rPr lang="en-US" sz="1250" dirty="0">
-                          <a:solidFill>
-                            <a:srgbClr val="26303F"/>
-                          </a:solidFill>
-                          <a:latin typeface="Calibri" pitchFamily="34" charset="0"/>
-                          <a:ea typeface="Calibri" pitchFamily="34" charset="-122"/>
-                          <a:cs typeface="Calibri" pitchFamily="34" charset="-120"/>
-                        </a:rPr>
-                        <a:t>Customer tier</a:t>
-                      </a:r>
-                      <a:endParaRPr lang="en-US" sz="1250" dirty="0">
-                        <a:latin typeface="Calibri" charset="0"/>
-                        <a:ea typeface="Calibri" charset="0"/>
-                        <a:cs typeface="Calibri" charset="0"/>
-                      </a:endParaRPr>
-                    </a:p>
-                  </a:txBody>
-                  <a:tcPr marL="76200" marR="76200" marT="25400" marB="25400" anchor="ctr">
-                    <a:lnL w="9525" cap="flat" cmpd="sng" algn="ctr">
-                      <a:solidFill>
-                        <a:srgbClr val="D5DAE1"/>
-                      </a:solidFill>
-                      <a:prstDash val="solid"/>
-                      <a:round/>
-                      <a:headEnd type="none" w="med" len="med"/>
-                      <a:tailEnd type="none" w="med" len="med"/>
-                    </a:lnL>
-                    <a:lnR w="9525" cap="flat" cmpd="sng" algn="ctr">
-                      <a:solidFill>
-                        <a:srgbClr val="D5DAE1"/>
-                      </a:solidFill>
-                      <a:prstDash val="solid"/>
-                      <a:round/>
-                      <a:headEnd type="none" w="med" len="med"/>
-                      <a:tailEnd type="none" w="med" len="med"/>
-                    </a:lnR>
-                    <a:lnT w="9525" cap="flat" cmpd="sng" algn="ctr">
-                      <a:solidFill>
-                        <a:srgbClr val="D5DAE1"/>
-                      </a:solidFill>
-                      <a:prstDash val="solid"/>
-                      <a:round/>
-                      <a:headEnd type="none" w="med" len="med"/>
-                      <a:tailEnd type="none" w="med" len="med"/>
-                    </a:lnT>
-                    <a:lnB w="9525" cap="flat" cmpd="sng" algn="ctr">
-                      <a:solidFill>
-                        <a:srgbClr val="D5DAE1"/>
-                      </a:solidFill>
-                      <a:prstDash val="solid"/>
-                      <a:round/>
-                      <a:headEnd type="none" w="med" len="med"/>
-                      <a:tailEnd type="none" w="med" len="med"/>
-                    </a:lnB>
-                    <a:solidFill>
-                      <a:srgbClr val="FFFFFF"/>
-                    </a:solidFill>
-                  </a:tcPr>
-                </a:tc>
-                <a:tc>
-                  <a:txBody>
-                    <a:bodyPr/>
-                    <a:lstStyle/>
-                    <a:p>
-                      <a:pPr indent="0" marL="0">
-                        <a:buNone/>
-                      </a:pPr>
-                      <a:r>
-                        <a:rPr lang="en-US" sz="1250" dirty="0">
-                          <a:solidFill>
-                            <a:srgbClr val="26303F"/>
-                          </a:solidFill>
-                          <a:latin typeface="Calibri" pitchFamily="34" charset="0"/>
-                          <a:ea typeface="Calibri" pitchFamily="34" charset="-122"/>
-                          <a:cs typeface="Calibri" pitchFamily="34" charset="-120"/>
-                        </a:rPr>
-                        <a:t>standard 0, premium 0.5, enterprise 1</a:t>
-                      </a:r>
-                      <a:endParaRPr lang="en-US" sz="1250" dirty="0">
-                        <a:latin typeface="Calibri" charset="0"/>
-                        <a:ea typeface="Calibri" charset="0"/>
-                        <a:cs typeface="Calibri" charset="0"/>
-                      </a:endParaRPr>
-                    </a:p>
-                  </a:txBody>
-                  <a:tcPr marL="76200" marR="76200" marT="25400" marB="25400" anchor="ctr">
-                    <a:lnL w="9525" cap="flat" cmpd="sng" algn="ctr">
-                      <a:solidFill>
-                        <a:srgbClr val="D5DAE1"/>
-                      </a:solidFill>
-                      <a:prstDash val="solid"/>
-                      <a:round/>
-                      <a:headEnd type="none" w="med" len="med"/>
-                      <a:tailEnd type="none" w="med" len="med"/>
-                    </a:lnL>
-                    <a:lnR w="9525" cap="flat" cmpd="sng" algn="ctr">
-                      <a:solidFill>
-                        <a:srgbClr val="D5DAE1"/>
-                      </a:solidFill>
-                      <a:prstDash val="solid"/>
-                      <a:round/>
-                      <a:headEnd type="none" w="med" len="med"/>
-                      <a:tailEnd type="none" w="med" len="med"/>
-                    </a:lnR>
-                    <a:lnT w="9525" cap="flat" cmpd="sng" algn="ctr">
-                      <a:solidFill>
-                        <a:srgbClr val="D5DAE1"/>
-                      </a:solidFill>
-                      <a:prstDash val="solid"/>
-                      <a:round/>
-                      <a:headEnd type="none" w="med" len="med"/>
-                      <a:tailEnd type="none" w="med" len="med"/>
-                    </a:lnT>
-                    <a:lnB w="9525" cap="flat" cmpd="sng" algn="ctr">
-                      <a:solidFill>
-                        <a:srgbClr val="D5DAE1"/>
-                      </a:solidFill>
-                      <a:prstDash val="solid"/>
-                      <a:round/>
-                      <a:headEnd type="none" w="med" len="med"/>
-                      <a:tailEnd type="none" w="med" len="med"/>
-                    </a:lnB>
-                    <a:solidFill>
-                      <a:srgbClr val="FFFFFF"/>
-                    </a:solidFill>
-                  </a:tcPr>
-                </a:tc>
-                <a:tc>
-                  <a:txBody>
-                    <a:bodyPr/>
-                    <a:lstStyle/>
-                    <a:p>
-                      <a:pPr indent="0" marL="0">
-                        <a:buNone/>
-                      </a:pPr>
-                      <a:r>
-                        <a:rPr lang="en-US" sz="1250" dirty="0">
-                          <a:solidFill>
-                            <a:srgbClr val="26303F"/>
-                          </a:solidFill>
-                          <a:latin typeface="Calibri" pitchFamily="34" charset="0"/>
-                          <a:ea typeface="Calibri" pitchFamily="34" charset="-122"/>
-                          <a:cs typeface="Calibri" pitchFamily="34" charset="-120"/>
-                        </a:rPr>
-                        <a:t>0.15</a:t>
-                      </a:r>
-                      <a:endParaRPr lang="en-US" sz="1250" dirty="0">
-                        <a:latin typeface="Calibri" charset="0"/>
-                        <a:ea typeface="Calibri" charset="0"/>
-                        <a:cs typeface="Calibri" charset="0"/>
-                      </a:endParaRPr>
-                    </a:p>
-                  </a:txBody>
-                  <a:tcPr marL="76200" marR="76200" marT="25400" marB="25400" anchor="ctr">
-                    <a:lnL w="9525" cap="flat" cmpd="sng" algn="ctr">
-                      <a:solidFill>
-                        <a:srgbClr val="D5DAE1"/>
-                      </a:solidFill>
-                      <a:prstDash val="solid"/>
-                      <a:round/>
-                      <a:headEnd type="none" w="med" len="med"/>
-                      <a:tailEnd type="none" w="med" len="med"/>
-                    </a:lnL>
-                    <a:lnR w="9525" cap="flat" cmpd="sng" algn="ctr">
-                      <a:solidFill>
-                        <a:srgbClr val="D5DAE1"/>
-                      </a:solidFill>
-                      <a:prstDash val="solid"/>
-                      <a:round/>
-                      <a:headEnd type="none" w="med" len="med"/>
-                      <a:tailEnd type="none" w="med" len="med"/>
-                    </a:lnR>
-                    <a:lnT w="9525" cap="flat" cmpd="sng" algn="ctr">
-                      <a:solidFill>
-                        <a:srgbClr val="D5DAE1"/>
-                      </a:solidFill>
-                      <a:prstDash val="solid"/>
-                      <a:round/>
-                      <a:headEnd type="none" w="med" len="med"/>
-                      <a:tailEnd type="none" w="med" len="med"/>
-                    </a:lnT>
-                    <a:lnB w="9525" cap="flat" cmpd="sng" algn="ctr">
-                      <a:solidFill>
-                        <a:srgbClr val="D5DAE1"/>
-                      </a:solidFill>
-                      <a:prstDash val="solid"/>
-                      <a:round/>
-                      <a:headEnd type="none" w="med" len="med"/>
-                      <a:tailEnd type="none" w="med" len="med"/>
-                    </a:lnB>
-                    <a:solidFill>
-                      <a:srgbClr val="FFFFFF"/>
-                    </a:solidFill>
-                  </a:tcPr>
-                </a:tc>
-              </a:tr>
-              <a:tr h="329184">
-                <a:tc>
-                  <a:txBody>
-                    <a:bodyPr/>
-                    <a:lstStyle/>
-                    <a:p>
-                      <a:pPr indent="0" marL="0">
-                        <a:buNone/>
-                      </a:pPr>
-                      <a:r>
-                        <a:rPr lang="en-US" sz="1250" dirty="0">
-                          <a:solidFill>
-                            <a:srgbClr val="26303F"/>
-                          </a:solidFill>
-                          <a:latin typeface="Calibri" pitchFamily="34" charset="0"/>
-                          <a:ea typeface="Calibri" pitchFamily="34" charset="-122"/>
-                          <a:cs typeface="Calibri" pitchFamily="34" charset="-120"/>
-                        </a:rPr>
-                        <a:t>Waiting time</a:t>
-                      </a:r>
-                      <a:endParaRPr lang="en-US" sz="1250" dirty="0">
-                        <a:latin typeface="Calibri" charset="0"/>
-                        <a:ea typeface="Calibri" charset="0"/>
-                        <a:cs typeface="Calibri" charset="0"/>
-                      </a:endParaRPr>
-                    </a:p>
-                  </a:txBody>
-                  <a:tcPr marL="76200" marR="76200" marT="25400" marB="25400" anchor="ctr">
-                    <a:lnL w="9525" cap="flat" cmpd="sng" algn="ctr">
-                      <a:solidFill>
-                        <a:srgbClr val="D5DAE1"/>
-                      </a:solidFill>
-                      <a:prstDash val="solid"/>
-                      <a:round/>
-                      <a:headEnd type="none" w="med" len="med"/>
-                      <a:tailEnd type="none" w="med" len="med"/>
-                    </a:lnL>
-                    <a:lnR w="9525" cap="flat" cmpd="sng" algn="ctr">
-                      <a:solidFill>
-                        <a:srgbClr val="D5DAE1"/>
-                      </a:solidFill>
-                      <a:prstDash val="solid"/>
-                      <a:round/>
-                      <a:headEnd type="none" w="med" len="med"/>
-                      <a:tailEnd type="none" w="med" len="med"/>
-                    </a:lnR>
-                    <a:lnT w="9525" cap="flat" cmpd="sng" algn="ctr">
-                      <a:solidFill>
-                        <a:srgbClr val="D5DAE1"/>
-                      </a:solidFill>
-                      <a:prstDash val="solid"/>
-                      <a:round/>
-                      <a:headEnd type="none" w="med" len="med"/>
-                      <a:tailEnd type="none" w="med" len="med"/>
-                    </a:lnT>
-                    <a:lnB w="9525" cap="flat" cmpd="sng" algn="ctr">
-                      <a:solidFill>
-                        <a:srgbClr val="D5DAE1"/>
-                      </a:solidFill>
-                      <a:prstDash val="solid"/>
-                      <a:round/>
-                      <a:headEnd type="none" w="med" len="med"/>
-                      <a:tailEnd type="none" w="med" len="med"/>
-                    </a:lnB>
-                    <a:solidFill>
-                      <a:srgbClr val="F7F8FA"/>
-                    </a:solidFill>
-                  </a:tcPr>
-                </a:tc>
-                <a:tc>
-                  <a:txBody>
-                    <a:bodyPr/>
-                    <a:lstStyle/>
-                    <a:p>
-                      <a:pPr indent="0" marL="0">
-                        <a:buNone/>
-                      </a:pPr>
-                      <a:r>
-                        <a:rPr lang="en-US" sz="1250" dirty="0">
-                          <a:solidFill>
-                            <a:srgbClr val="26303F"/>
-                          </a:solidFill>
-                          <a:latin typeface="Calibri" pitchFamily="34" charset="0"/>
-                          <a:ea typeface="Calibri" pitchFamily="34" charset="-122"/>
-                          <a:cs typeface="Calibri" pitchFamily="34" charset="-120"/>
-                        </a:rPr>
-                        <a:t>min(1, hours ÷ 72)</a:t>
-                      </a:r>
-                      <a:endParaRPr lang="en-US" sz="1250" dirty="0">
-                        <a:latin typeface="Calibri" charset="0"/>
-                        <a:ea typeface="Calibri" charset="0"/>
-                        <a:cs typeface="Calibri" charset="0"/>
-                      </a:endParaRPr>
-                    </a:p>
-                  </a:txBody>
-                  <a:tcPr marL="76200" marR="76200" marT="25400" marB="25400" anchor="ctr">
-                    <a:lnL w="9525" cap="flat" cmpd="sng" algn="ctr">
-                      <a:solidFill>
-                        <a:srgbClr val="D5DAE1"/>
-                      </a:solidFill>
-                      <a:prstDash val="solid"/>
-                      <a:round/>
-                      <a:headEnd type="none" w="med" len="med"/>
-                      <a:tailEnd type="none" w="med" len="med"/>
-                    </a:lnL>
-                    <a:lnR w="9525" cap="flat" cmpd="sng" algn="ctr">
-                      <a:solidFill>
-                        <a:srgbClr val="D5DAE1"/>
-                      </a:solidFill>
-                      <a:prstDash val="solid"/>
-                      <a:round/>
-                      <a:headEnd type="none" w="med" len="med"/>
-                      <a:tailEnd type="none" w="med" len="med"/>
-                    </a:lnR>
-                    <a:lnT w="9525" cap="flat" cmpd="sng" algn="ctr">
-                      <a:solidFill>
-                        <a:srgbClr val="D5DAE1"/>
-                      </a:solidFill>
-                      <a:prstDash val="solid"/>
-                      <a:round/>
-                      <a:headEnd type="none" w="med" len="med"/>
-                      <a:tailEnd type="none" w="med" len="med"/>
-                    </a:lnT>
-                    <a:lnB w="9525" cap="flat" cmpd="sng" algn="ctr">
-                      <a:solidFill>
-                        <a:srgbClr val="D5DAE1"/>
-                      </a:solidFill>
-                      <a:prstDash val="solid"/>
-                      <a:round/>
-                      <a:headEnd type="none" w="med" len="med"/>
-                      <a:tailEnd type="none" w="med" len="med"/>
-                    </a:lnB>
-                    <a:solidFill>
-                      <a:srgbClr val="F7F8FA"/>
-                    </a:solidFill>
-                  </a:tcPr>
-                </a:tc>
-                <a:tc>
-                  <a:txBody>
-                    <a:bodyPr/>
-                    <a:lstStyle/>
-                    <a:p>
-                      <a:pPr indent="0" marL="0">
-                        <a:buNone/>
-                      </a:pPr>
-                      <a:r>
-                        <a:rPr lang="en-US" sz="1250" dirty="0">
-                          <a:solidFill>
-                            <a:srgbClr val="26303F"/>
-                          </a:solidFill>
-                          <a:latin typeface="Calibri" pitchFamily="34" charset="0"/>
-                          <a:ea typeface="Calibri" pitchFamily="34" charset="-122"/>
-                          <a:cs typeface="Calibri" pitchFamily="34" charset="-120"/>
-                        </a:rPr>
-                        <a:t>0.10</a:t>
-                      </a:r>
-                      <a:endParaRPr lang="en-US" sz="1250" dirty="0">
-                        <a:latin typeface="Calibri" charset="0"/>
-                        <a:ea typeface="Calibri" charset="0"/>
-                        <a:cs typeface="Calibri" charset="0"/>
-                      </a:endParaRPr>
-                    </a:p>
-                  </a:txBody>
-                  <a:tcPr marL="76200" marR="76200" marT="25400" marB="25400" anchor="ctr">
-                    <a:lnL w="9525" cap="flat" cmpd="sng" algn="ctr">
-                      <a:solidFill>
-                        <a:srgbClr val="D5DAE1"/>
-                      </a:solidFill>
-                      <a:prstDash val="solid"/>
-                      <a:round/>
-                      <a:headEnd type="none" w="med" len="med"/>
-                      <a:tailEnd type="none" w="med" len="med"/>
-                    </a:lnL>
-                    <a:lnR w="9525" cap="flat" cmpd="sng" algn="ctr">
-                      <a:solidFill>
-                        <a:srgbClr val="D5DAE1"/>
-                      </a:solidFill>
-                      <a:prstDash val="solid"/>
-                      <a:round/>
-                      <a:headEnd type="none" w="med" len="med"/>
-                      <a:tailEnd type="none" w="med" len="med"/>
-                    </a:lnR>
-                    <a:lnT w="9525" cap="flat" cmpd="sng" algn="ctr">
-                      <a:solidFill>
-                        <a:srgbClr val="D5DAE1"/>
-                      </a:solidFill>
-                      <a:prstDash val="solid"/>
-                      <a:round/>
-                      <a:headEnd type="none" w="med" len="med"/>
-                      <a:tailEnd type="none" w="med" len="med"/>
-                    </a:lnT>
-                    <a:lnB w="9525" cap="flat" cmpd="sng" algn="ctr">
-                      <a:solidFill>
-                        <a:srgbClr val="D5DAE1"/>
-                      </a:solidFill>
-                      <a:prstDash val="solid"/>
-                      <a:round/>
-                      <a:headEnd type="none" w="med" len="med"/>
-                      <a:tailEnd type="none" w="med" len="med"/>
-                    </a:lnB>
-                    <a:solidFill>
-                      <a:srgbClr val="F7F8FA"/>
-                    </a:solidFill>
-                  </a:tcPr>
-                </a:tc>
-              </a:tr>
-            </a:tbl>
-          </a:graphicData>
-        </a:graphic>
-      </p:graphicFrame>
-      <p:sp>
-        <p:nvSpPr>
-          <p:cNvPr id="10" name="Text 6"/>
-          <p:cNvSpPr/>
-          <p:nvPr/>
-        </p:nvSpPr>
-        <p:spPr>
-          <a:xfrm>
-            <a:off x="548640" y="3566160"/>
-            <a:ext cx="5394960" cy="731520"/>
-          </a:xfrm>
-          <a:prstGeom prst="rect">
-            <a:avLst/>
-          </a:prstGeom>
-          <a:noFill/>
-          <a:ln/>
-        </p:spPr>
-        <p:txBody>
-          <a:bodyPr wrap="square" lIns="0" tIns="0" rIns="0" bIns="0" rtlCol="0" anchor="ctr"/>
-          <a:lstStyle/>
-          <a:p>
-            <a:pPr indent="0" marL="0">
-              <a:buNone/>
-            </a:pPr>
-            <a:r>
-              <a:rPr lang="en-US" sz="1600" dirty="0">
-                <a:solidFill>
-                  <a:srgbClr val="14213D"/>
-                </a:solidFill>
-                <a:latin typeface="Georgia" pitchFamily="34" charset="0"/>
-                <a:ea typeface="Georgia" pitchFamily="34" charset="-122"/>
-                <a:cs typeface="Georgia" pitchFamily="34" charset="-120"/>
-              </a:rPr>
-              <a:t>score = 100 × Σ (weight × scaled value)</a:t>
-            </a:r>
-            <a:endParaRPr lang="en-US" sz="1600" dirty="0"/>
-          </a:p>
-          <a:p>
-            <a:pPr indent="0" marL="0">
-              <a:buNone/>
-            </a:pPr>
-            <a:r>
-              <a:rPr lang="en-US" sz="1350" dirty="0">
-                <a:solidFill>
-                  <a:srgbClr val="26303F"/>
-                </a:solidFill>
-                <a:latin typeface="Calibri" pitchFamily="34" charset="0"/>
-                <a:ea typeface="Calibri" pitchFamily="34" charset="-122"/>
-                <a:cs typeface="Calibri" pitchFamily="34" charset="-120"/>
-              </a:rPr>
-              <a:t>P1 from 75, P2 from 50, P3 from 25, otherwise P4</a:t>
-            </a:r>
-            <a:endParaRPr lang="en-US" sz="1600" dirty="0"/>
           </a:p>
         </p:txBody>
       </p:sp>
@@ -3932,8 +2815,8 @@
         </p:nvSpPr>
         <p:spPr>
           <a:xfrm>
-            <a:off x="548640" y="4434840"/>
-            <a:ext cx="5394960" cy="1737360"/>
+            <a:off x="548640" y="4206240"/>
+            <a:ext cx="5394960" cy="1965960"/>
           </a:xfrm>
           <a:prstGeom prst="rect">
             <a:avLst/>
@@ -3957,8 +2840,8 @@
         </p:nvSpPr>
         <p:spPr>
           <a:xfrm>
-            <a:off x="731520" y="4544568"/>
-            <a:ext cx="5029200" cy="1517904"/>
+            <a:off x="731520" y="4316000"/>
+            <a:ext cx="5029200" cy="1746000"/>
           </a:xfrm>
           <a:prstGeom prst="rect">
             <a:avLst/>
@@ -3997,7 +2880,7 @@
               <a:buNone/>
             </a:pPr>
             <a:r>
-              <a:rPr lang="en-US" sz="1350" dirty="0">
+              <a:rPr lang="en-US" sz="1600" dirty="0">
                 <a:solidFill>
                   <a:srgbClr val="26303F"/>
                 </a:solidFill>
@@ -4005,7 +2888,7 @@
                 <a:ea typeface="Calibri" pitchFamily="34" charset="-122"/>
                 <a:cs typeface="Calibri" pitchFamily="34" charset="-120"/>
               </a:rPr>
-              <a:t>Impact 2, urgency 3 and a premium customer give 13.3 + 23.3 + 7.5 + 3.3 = 47.5 (P3) after one day.</a:t>
+              <a:t>Impact 2, urgency 3, premium customer: 47.5 (P3) after one day.</a:t>
             </a:r>
             <a:endParaRPr lang="en-US" sz="1350" dirty="0"/>
           </a:p>
@@ -4017,7 +2900,7 @@
               <a:buNone/>
             </a:pPr>
             <a:r>
-              <a:rPr lang="en-US" sz="1350" dirty="0">
+              <a:rPr lang="en-US" sz="1600" dirty="0">
                 <a:solidFill>
                   <a:srgbClr val="26303F"/>
                 </a:solidFill>
@@ -4025,7 +2908,7 @@
                 <a:ea typeface="Calibri" pitchFamily="34" charset="-122"/>
                 <a:cs typeface="Calibri" pitchFamily="34" charset="-120"/>
               </a:rPr>
-              <a:t>After three days the same ticket scores 54.2 and rises to P2. A manager can always set the priority by hand.</a:t>
+              <a:t>After three days it scores 54.2 and rises to P2.</a:t>
             </a:r>
             <a:endParaRPr lang="en-US" sz="1350" dirty="0"/>
           </a:p>
@@ -4087,7 +2970,7 @@
                 <a:ea typeface="Georgia" pitchFamily="34" charset="-122"/>
                 <a:cs typeface="Georgia" pitchFamily="34" charset="-120"/>
               </a:rPr>
-              <a:t>Least-loaded eligible agent</a:t>
+              <a:t>Agent assignment</a:t>
             </a:r>
             <a:endParaRPr lang="en-US" sz="1800" dirty="0"/>
           </a:p>
@@ -4119,13 +3002,13 @@
                 <a:spcPct val="105000"/>
               </a:lnSpc>
               <a:spcAft>
-                <a:spcPts val="700"/>
+                <a:spcPts val="1400"/>
               </a:spcAft>
               <a:buSzPct val="100000"/>
               <a:buChar char="•"/>
             </a:pPr>
             <a:r>
-              <a:rPr lang="en-US" sz="1400" dirty="0">
+              <a:rPr lang="en-US" sz="1800" dirty="0">
                 <a:solidFill>
                   <a:srgbClr val="26303F"/>
                 </a:solidFill>
@@ -4133,7 +3016,7 @@
                 <a:ea typeface="Calibri" pitchFamily="34" charset="-122"/>
                 <a:cs typeface="Calibri" pitchFamily="34" charset="-120"/>
               </a:rPr>
-              <a:t>An agent is eligible when available, on shift, holding every skill the category needs, in the ticket's team and below capacity.</a:t>
+              <a:t>Eligible: available, on shift, has the needed skills, in the team, below capacity.</a:t>
             </a:r>
             <a:endParaRPr lang="en-US" sz="1400" dirty="0"/>
           </a:p>
@@ -4143,13 +3026,13 @@
                 <a:spcPct val="105000"/>
               </a:lnSpc>
               <a:spcAft>
-                <a:spcPts val="700"/>
+                <a:spcPts val="1400"/>
               </a:spcAft>
               <a:buSzPct val="100000"/>
               <a:buChar char="•"/>
             </a:pPr>
             <a:r>
-              <a:rPr lang="en-US" sz="1400" dirty="0">
+              <a:rPr lang="en-US" sz="1800" dirty="0">
                 <a:solidFill>
                   <a:srgbClr val="26303F"/>
                 </a:solidFill>
@@ -4157,7 +3040,7 @@
                 <a:ea typeface="Calibri" pitchFamily="34" charset="-122"/>
                 <a:cs typeface="Calibri" pitchFamily="34" charset="-120"/>
               </a:rPr>
-              <a:t>Eligible agents are ordered by open tickets per unit of capacity; a tie goes to the one assigned least recently.</a:t>
+              <a:t>Lowest load wins (open tickets ÷ capacity); a tie goes to the least recently assigned.</a:t>
             </a:r>
             <a:endParaRPr lang="en-US" sz="1400" dirty="0"/>
           </a:p>
@@ -4167,13 +3050,13 @@
                 <a:spcPct val="105000"/>
               </a:lnSpc>
               <a:spcAft>
-                <a:spcPts val="700"/>
+                <a:spcPts val="1400"/>
               </a:spcAft>
               <a:buSzPct val="100000"/>
               <a:buChar char="•"/>
             </a:pPr>
             <a:r>
-              <a:rPr lang="en-US" sz="1400" dirty="0">
+              <a:rPr lang="en-US" sz="1800" dirty="0">
                 <a:solidFill>
                   <a:srgbClr val="26303F"/>
                 </a:solidFill>
@@ -4181,23 +3064,45 @@
                 <a:ea typeface="Calibri" pitchFamily="34" charset="-122"/>
                 <a:cs typeface="Calibri" pitchFamily="34" charset="-120"/>
               </a:rPr>
-              <a:t>Agents left out are listed with the rule they failed. If nobody is eligible, managers are notified.</a:t>
+              <a:t>Agents left out are shown with the rule they failed.</a:t>
             </a:r>
             <a:endParaRPr lang="en-US" sz="1400" dirty="0"/>
           </a:p>
+        </p:txBody>
+      </p:sp>
+      <p:sp>
+        <p:nvSpPr>
+          <p:cNvPr id="1000" name="Text 14"/>
+          <p:cNvSpPr/>
+          <p:nvPr/>
+        </p:nvSpPr>
+        <p:spPr>
+          <a:xfrm>
+            <a:off x="548640" y="1783080"/>
+            <a:ext cx="5394960" cy="2560320"/>
+          </a:xfrm>
+          <a:prstGeom prst="rect">
+            <a:avLst/>
+          </a:prstGeom>
+          <a:noFill/>
+          <a:ln/>
+        </p:spPr>
+        <p:txBody>
+          <a:bodyPr wrap="square" lIns="25400" tIns="25400" rIns="25400" bIns="25400" rtlCol="0" anchor="t"/>
+          <a:lstStyle/>
           <a:p>
             <a:pPr marL="190500" indent="-190500">
               <a:lnSpc>
                 <a:spcPct val="105000"/>
               </a:lnSpc>
               <a:spcAft>
-                <a:spcPts val="700"/>
+                <a:spcPts val="1400"/>
               </a:spcAft>
               <a:buSzPct val="100000"/>
               <a:buChar char="•"/>
             </a:pPr>
             <a:r>
-              <a:rPr lang="en-US" sz="1400" dirty="0">
+              <a:rPr lang="en-US" sz="1800" dirty="0">
                 <a:solidFill>
                   <a:srgbClr val="26303F"/>
                 </a:solidFill>
@@ -4205,7 +3110,55 @@
                 <a:ea typeface="Calibri" pitchFamily="34" charset="-122"/>
                 <a:cs typeface="Calibri" pitchFamily="34" charset="-120"/>
               </a:rPr>
-              <a:t>Cost: O(A log A) for A agents.</a:t>
+              <a:t>Weighted sum of impact, urgency, customer tier and waiting time, each scaled to 0–1.</a:t>
+            </a:r>
+            <a:endParaRPr lang="en-US" sz="1400" dirty="0"/>
+          </a:p>
+          <a:p>
+            <a:pPr marL="190500" indent="-190500">
+              <a:lnSpc>
+                <a:spcPct val="105000"/>
+              </a:lnSpc>
+              <a:spcAft>
+                <a:spcPts val="1400"/>
+              </a:spcAft>
+              <a:buSzPct val="100000"/>
+              <a:buChar char="•"/>
+            </a:pPr>
+            <a:r>
+              <a:rPr lang="en-US" sz="1800" dirty="0">
+                <a:solidFill>
+                  <a:srgbClr val="26303F"/>
+                </a:solidFill>
+                <a:latin typeface="Calibri" pitchFamily="34" charset="0"/>
+                <a:ea typeface="Calibri" pitchFamily="34" charset="-122"/>
+                <a:cs typeface="Calibri" pitchFamily="34" charset="-120"/>
+              </a:rPr>
+              <a:t>score = 100 × Σ (weight × value), weights 0.40, 0.35, 0.15, 0.10.</a:t>
+            </a:r>
+            <a:endParaRPr lang="en-US" sz="1400" dirty="0"/>
+          </a:p>
+          <a:p>
+            <a:pPr marL="190500" indent="-190500">
+              <a:lnSpc>
+                <a:spcPct val="105000"/>
+              </a:lnSpc>
+              <a:spcAft>
+                <a:spcPts val="1400"/>
+              </a:spcAft>
+              <a:buSzPct val="100000"/>
+              <a:buChar char="•"/>
+            </a:pPr>
+            <a:r>
+              <a:rPr lang="en-US" sz="1800" dirty="0">
+                <a:solidFill>
+                  <a:srgbClr val="26303F"/>
+                </a:solidFill>
+                <a:latin typeface="Calibri" pitchFamily="34" charset="0"/>
+                <a:ea typeface="Calibri" pitchFamily="34" charset="-122"/>
+                <a:cs typeface="Calibri" pitchFamily="34" charset="-120"/>
+              </a:rPr>
+              <a:t>P1 from 75, P2 from 50, P3 from 25, otherwise P4.</a:t>
             </a:r>
             <a:endParaRPr lang="en-US" sz="1400" dirty="0"/>
           </a:p>
@@ -4219,8 +3172,8 @@
         </p:nvSpPr>
         <p:spPr>
           <a:xfrm>
-            <a:off x="6583680" y="4434840"/>
-            <a:ext cx="5056632" cy="1737360"/>
+            <a:off x="6583680" y="4206240"/>
+            <a:ext cx="5056632" cy="1965960"/>
           </a:xfrm>
           <a:prstGeom prst="rect">
             <a:avLst/>
@@ -4244,8 +3197,8 @@
         </p:nvSpPr>
         <p:spPr>
           <a:xfrm>
-            <a:off x="6766560" y="4544568"/>
-            <a:ext cx="4690872" cy="1517904"/>
+            <a:off x="6766560" y="4316000"/>
+            <a:ext cx="4690872" cy="1746000"/>
           </a:xfrm>
           <a:prstGeom prst="rect">
             <a:avLst/>
@@ -4284,7 +3237,7 @@
               <a:buNone/>
             </a:pPr>
             <a:r>
-              <a:rPr lang="en-US" sz="1350" dirty="0">
+              <a:rPr lang="en-US" sz="1600" dirty="0">
                 <a:solidFill>
                   <a:srgbClr val="26303F"/>
                 </a:solidFill>
@@ -4292,7 +3245,7 @@
                 <a:ea typeface="Calibri" pitchFamily="34" charset="-122"/>
                 <a:cs typeface="Calibri" pitchFamily="34" charset="-120"/>
               </a:rPr>
-              <a:t>Asha and Chen each have 3 of 10 tickets (0.30); Bikram has 2 of 5 (0.40).</a:t>
+              <a:t>Asha and Chen have 3 of 10 (0.30), Bikram 2 of 5 (0.40).</a:t>
             </a:r>
             <a:endParaRPr lang="en-US" sz="1350" dirty="0"/>
           </a:p>
@@ -4304,7 +3257,7 @@
               <a:buNone/>
             </a:pPr>
             <a:r>
-              <a:rPr lang="en-US" sz="1350" dirty="0">
+              <a:rPr lang="en-US" sz="1600" dirty="0">
                 <a:solidFill>
                   <a:srgbClr val="26303F"/>
                 </a:solidFill>
@@ -4312,7 +3265,7 @@
                 <a:ea typeface="Calibri" pitchFamily="34" charset="-122"/>
                 <a:cs typeface="Calibri" pitchFamily="34" charset="-120"/>
               </a:rPr>
-              <a:t>Asha and Chen tie on load, and Chen was assigned earlier, so Chen receives the ticket.</a:t>
+              <a:t>Asha and Chen tie; Chen was assigned earlier, so Chen gets it.</a:t>
             </a:r>
             <a:endParaRPr lang="en-US" sz="1350" dirty="0"/>
           </a:p>
@@ -4383,7 +3336,7 @@
                 <a:ea typeface="Georgia" pitchFamily="34" charset="-122"/>
                 <a:cs typeface="Georgia" pitchFamily="34" charset="-120"/>
               </a:rPr>
-              <a:t>Duplicates, SLA Timers and History</a:t>
+              <a:t>Algorithms (2/2)</a:t>
             </a:r>
             <a:endParaRPr lang="en-US" sz="2800" dirty="0"/>
           </a:p>
@@ -4523,8 +3476,8 @@
         </p:nvSpPr>
         <p:spPr>
           <a:xfrm>
-            <a:off x="548640" y="1280160"/>
-            <a:ext cx="3547872" cy="384048"/>
+            <a:off x="548640" y="1325880"/>
+            <a:ext cx="5394960" cy="365760"/>
           </a:xfrm>
           <a:prstGeom prst="rect">
             <a:avLst/>
@@ -4533,14 +3486,14 @@
           <a:ln/>
         </p:spPr>
         <p:txBody>
-          <a:bodyPr wrap="square" lIns="0" tIns="0" rIns="0" bIns="0" rtlCol="0" anchor="b"/>
+          <a:bodyPr wrap="square" lIns="0" tIns="0" rIns="0" bIns="0" rtlCol="0" anchor="ctr"/>
           <a:lstStyle/>
           <a:p>
             <a:pPr indent="0" marL="0">
               <a:buNone/>
             </a:pPr>
             <a:r>
-              <a:rPr lang="en-US" sz="1700" dirty="0">
+              <a:rPr lang="en-US" sz="1800" dirty="0">
                 <a:solidFill>
                   <a:srgbClr val="14213D"/>
                 </a:solidFill>
@@ -4550,20 +3503,107 @@
               </a:rPr>
               <a:t>Duplicate detection</a:t>
             </a:r>
-            <a:endParaRPr lang="en-US" sz="1700" dirty="0"/>
+            <a:endParaRPr lang="en-US" sz="1800" dirty="0"/>
           </a:p>
         </p:txBody>
       </p:sp>
       <p:sp>
         <p:nvSpPr>
-          <p:cNvPr id="9" name="Shape 6"/>
+          <p:cNvPr id="11" name="Shape 7"/>
           <p:cNvSpPr/>
           <p:nvPr/>
         </p:nvSpPr>
         <p:spPr>
           <a:xfrm>
-            <a:off x="548640" y="1737360"/>
-            <a:ext cx="3547872" cy="0"/>
+            <a:off x="548640" y="4206240"/>
+            <a:ext cx="5394960" cy="1965960"/>
+          </a:xfrm>
+          <a:prstGeom prst="rect">
+            <a:avLst/>
+          </a:prstGeom>
+          <a:solidFill>
+            <a:srgbClr val="F4F6F9"/>
+          </a:solidFill>
+          <a:ln w="12700">
+            <a:solidFill>
+              <a:srgbClr val="F4F6F9"/>
+            </a:solidFill>
+            <a:prstDash val="solid"/>
+          </a:ln>
+        </p:spPr>
+      </p:sp>
+      <p:sp>
+        <p:nvSpPr>
+          <p:cNvPr id="12" name="Text 8"/>
+          <p:cNvSpPr/>
+          <p:nvPr/>
+        </p:nvSpPr>
+        <p:spPr>
+          <a:xfrm>
+            <a:off x="731520" y="4316000"/>
+            <a:ext cx="5029200" cy="1746000"/>
+          </a:xfrm>
+          <a:prstGeom prst="rect">
+            <a:avLst/>
+          </a:prstGeom>
+          <a:noFill/>
+          <a:ln/>
+        </p:spPr>
+        <p:txBody>
+          <a:bodyPr wrap="square" lIns="0" tIns="0" rIns="0" bIns="0" rtlCol="0" anchor="t"/>
+          <a:lstStyle/>
+          <a:p>
+            <a:pPr indent="0" marL="0">
+              <a:spcAft>
+                <a:spcPts val="500"/>
+              </a:spcAft>
+              <a:buNone/>
+            </a:pPr>
+            <a:r>
+              <a:rPr lang="en-US" sz="1450" dirty="0">
+                <a:solidFill>
+                  <a:srgbClr val="14213D"/>
+                </a:solidFill>
+                <a:latin typeface="Georgia" pitchFamily="34" charset="0"/>
+                <a:ea typeface="Georgia" pitchFamily="34" charset="-122"/>
+                <a:cs typeface="Georgia" pitchFamily="34" charset="-120"/>
+              </a:rPr>
+              <a:t>Example</a:t>
+            </a:r>
+            <a:endParaRPr lang="en-US" sz="1350" dirty="0"/>
+          </a:p>
+          <a:p>
+            <a:pPr indent="0" marL="0">
+              <a:spcAft>
+                <a:spcPts val="300"/>
+              </a:spcAft>
+              <a:buNone/>
+            </a:pPr>
+            <a:r>
+              <a:rPr lang="en-US" sz="1600" dirty="0">
+                <a:solidFill>
+                  <a:srgbClr val="26303F"/>
+                </a:solidFill>
+                <a:latin typeface="Calibri" pitchFamily="34" charset="0"/>
+                <a:ea typeface="Calibri" pitchFamily="34" charset="-122"/>
+                <a:cs typeface="Calibri" pitchFamily="34" charset="-120"/>
+              </a:rPr>
+              <a:t>"Cannot login after password reset" and "Login fails after resetting password" score 0.50.</a:t>
+            </a:r>
+            <a:endParaRPr lang="en-US" sz="1350" dirty="0"/>
+          </a:p>
+        </p:txBody>
+      </p:sp>
+      <p:sp>
+        <p:nvSpPr>
+          <p:cNvPr id="13" name="Shape 9"/>
+          <p:cNvSpPr/>
+          <p:nvPr/>
+        </p:nvSpPr>
+        <p:spPr>
+          <a:xfrm>
+            <a:off x="6263640" y="1371600"/>
+            <a:ext cx="0" cy="4800600"/>
           </a:xfrm>
           <a:prstGeom prst="line">
             <a:avLst/>
@@ -4579,14 +3619,53 @@
       </p:sp>
       <p:sp>
         <p:nvSpPr>
-          <p:cNvPr id="10" name="Text 7"/>
+          <p:cNvPr id="14" name="Text 10"/>
           <p:cNvSpPr/>
           <p:nvPr/>
         </p:nvSpPr>
         <p:spPr>
           <a:xfrm>
-            <a:off x="548640" y="1847088"/>
-            <a:ext cx="3547872" cy="4370832"/>
+            <a:off x="6583680" y="1325880"/>
+            <a:ext cx="5029200" cy="365760"/>
+          </a:xfrm>
+          <a:prstGeom prst="rect">
+            <a:avLst/>
+          </a:prstGeom>
+          <a:noFill/>
+          <a:ln/>
+        </p:spPr>
+        <p:txBody>
+          <a:bodyPr wrap="square" lIns="0" tIns="0" rIns="0" bIns="0" rtlCol="0" anchor="ctr"/>
+          <a:lstStyle/>
+          <a:p>
+            <a:pPr indent="0" marL="0">
+              <a:buNone/>
+            </a:pPr>
+            <a:r>
+              <a:rPr lang="en-US" sz="1800" dirty="0">
+                <a:solidFill>
+                  <a:srgbClr val="14213D"/>
+                </a:solidFill>
+                <a:latin typeface="Georgia" pitchFamily="34" charset="0"/>
+                <a:ea typeface="Georgia" pitchFamily="34" charset="-122"/>
+                <a:cs typeface="Georgia" pitchFamily="34" charset="-120"/>
+              </a:rPr>
+              <a:t>SLA timer</a:t>
+            </a:r>
+            <a:endParaRPr lang="en-US" sz="1800" dirty="0"/>
+          </a:p>
+        </p:txBody>
+      </p:sp>
+      <p:sp>
+        <p:nvSpPr>
+          <p:cNvPr id="15" name="Text 11"/>
+          <p:cNvSpPr/>
+          <p:nvPr/>
+        </p:nvSpPr>
+        <p:spPr>
+          <a:xfrm>
+            <a:off x="6583680" y="1783080"/>
+            <a:ext cx="5056632" cy="2560320"/>
           </a:xfrm>
           <a:prstGeom prst="rect">
             <a:avLst/>
@@ -4609,7 +3688,7 @@
               <a:buChar char="•"/>
             </a:pPr>
             <a:r>
-              <a:rPr lang="en-US" sz="1600" dirty="0">
+              <a:rPr lang="en-US" sz="1800" dirty="0">
                 <a:solidFill>
                   <a:srgbClr val="26303F"/>
                 </a:solidFill>
@@ -4617,9 +3696,9 @@
                 <a:ea typeface="Calibri" pitchFamily="34" charset="-122"/>
                 <a:cs typeface="Calibri" pitchFamily="34" charset="-120"/>
               </a:rPr>
-              <a:t>Each ticket becomes a set of words, without 117 common stop words and very short words.</a:t>
-            </a:r>
-            <a:endParaRPr lang="en-US" sz="1600" dirty="0"/>
+              <a:t>First-response and resolution timers, in all hours or working hours.</a:t>
+            </a:r>
+            <a:endParaRPr lang="en-US" sz="1400" dirty="0"/>
           </a:p>
           <a:p>
             <a:pPr marL="190500" indent="-190500">
@@ -4633,7 +3712,7 @@
               <a:buChar char="•"/>
             </a:pPr>
             <a:r>
-              <a:rPr lang="en-US" sz="1600" dirty="0">
+              <a:rPr lang="en-US" sz="1800" dirty="0">
                 <a:solidFill>
                   <a:srgbClr val="26303F"/>
                 </a:solidFill>
@@ -4641,9 +3720,9 @@
                 <a:ea typeface="Calibri" pitchFamily="34" charset="-122"/>
                 <a:cs typeface="Calibri" pitchFamily="34" charset="-120"/>
               </a:rPr>
-              <a:t>Two tickets are compared by Jaccard similarity: shared words ÷ all distinct words.</a:t>
-            </a:r>
-            <a:endParaRPr lang="en-US" sz="1600" dirty="0"/>
+              <a:t>Warning at 75 % of the target; breach recorded at the deadline.</a:t>
+            </a:r>
+            <a:endParaRPr lang="en-US" sz="1400" dirty="0"/>
           </a:p>
           <a:p>
             <a:pPr marL="190500" indent="-190500">
@@ -4657,7 +3736,7 @@
               <a:buChar char="•"/>
             </a:pPr>
             <a:r>
-              <a:rPr lang="en-US" sz="1600" dirty="0">
+              <a:rPr lang="en-US" sz="1800" dirty="0">
                 <a:solidFill>
                   <a:srgbClr val="26303F"/>
                 </a:solidFill>
@@ -4665,10 +3744,32 @@
                 <a:ea typeface="Calibri" pitchFamily="34" charset="-122"/>
                 <a:cs typeface="Calibri" pitchFamily="34" charset="-120"/>
               </a:rPr>
-              <a:t>Open tickets of the same workspace from the last 30 days scoring 0.35 or more are suggested, top five first.</a:t>
-            </a:r>
-            <a:endParaRPr lang="en-US" sz="1600" dirty="0"/>
-          </a:p>
+              <a:t>Paused while waiting for the customer; the deadline moves by the pause.</a:t>
+            </a:r>
+            <a:endParaRPr lang="en-US" sz="1400" dirty="0"/>
+          </a:p>
+        </p:txBody>
+      </p:sp>
+      <p:sp>
+        <p:nvSpPr>
+          <p:cNvPr id="1000" name="Text 14"/>
+          <p:cNvSpPr/>
+          <p:nvPr/>
+        </p:nvSpPr>
+        <p:spPr>
+          <a:xfrm>
+            <a:off x="548640" y="1783080"/>
+            <a:ext cx="5394960" cy="2560320"/>
+          </a:xfrm>
+          <a:prstGeom prst="rect">
+            <a:avLst/>
+          </a:prstGeom>
+          <a:noFill/>
+          <a:ln/>
+        </p:spPr>
+        <p:txBody>
+          <a:bodyPr wrap="square" lIns="25400" tIns="25400" rIns="25400" bIns="25400" rtlCol="0" anchor="t"/>
+          <a:lstStyle/>
           <a:p>
             <a:pPr marL="190500" indent="-190500">
               <a:lnSpc>
@@ -4681,7 +3782,7 @@
               <a:buChar char="•"/>
             </a:pPr>
             <a:r>
-              <a:rPr lang="en-US" sz="1600" dirty="0">
+              <a:rPr lang="en-US" sz="1800" dirty="0">
                 <a:solidFill>
                   <a:srgbClr val="26303F"/>
                 </a:solidFill>
@@ -4689,94 +3790,10 @@
                 <a:ea typeface="Calibri" pitchFamily="34" charset="-122"/>
                 <a:cs typeface="Calibri" pitchFamily="34" charset="-120"/>
               </a:rPr>
-              <a:t>"Cannot login after password reset" and "Login fails after resetting password" share half their words (0.50) and are suggested.</a:t>
-            </a:r>
-            <a:endParaRPr lang="en-US" sz="1600" dirty="0"/>
-          </a:p>
-        </p:txBody>
-      </p:sp>
-      <p:sp>
-        <p:nvSpPr>
-          <p:cNvPr id="11" name="Text 8"/>
-          <p:cNvSpPr/>
-          <p:nvPr/>
-        </p:nvSpPr>
-        <p:spPr>
-          <a:xfrm>
-            <a:off x="4325112" y="1280160"/>
-            <a:ext cx="3547872" cy="384048"/>
-          </a:xfrm>
-          <a:prstGeom prst="rect">
-            <a:avLst/>
-          </a:prstGeom>
-          <a:noFill/>
-          <a:ln/>
-        </p:spPr>
-        <p:txBody>
-          <a:bodyPr wrap="square" lIns="0" tIns="0" rIns="0" bIns="0" rtlCol="0" anchor="b"/>
-          <a:lstStyle/>
-          <a:p>
-            <a:pPr indent="0" marL="0">
-              <a:buNone/>
-            </a:pPr>
-            <a:r>
-              <a:rPr lang="en-US" sz="1700" dirty="0">
-                <a:solidFill>
-                  <a:srgbClr val="14213D"/>
-                </a:solidFill>
-                <a:latin typeface="Georgia" pitchFamily="34" charset="0"/>
-                <a:ea typeface="Georgia" pitchFamily="34" charset="-122"/>
-                <a:cs typeface="Georgia" pitchFamily="34" charset="-120"/>
-              </a:rPr>
-              <a:t>SLA timer</a:t>
-            </a:r>
-            <a:endParaRPr lang="en-US" sz="1700" dirty="0"/>
-          </a:p>
-        </p:txBody>
-      </p:sp>
-      <p:sp>
-        <p:nvSpPr>
-          <p:cNvPr id="12" name="Shape 9"/>
-          <p:cNvSpPr/>
-          <p:nvPr/>
-        </p:nvSpPr>
-        <p:spPr>
-          <a:xfrm>
-            <a:off x="4325112" y="1737360"/>
-            <a:ext cx="3547872" cy="0"/>
-          </a:xfrm>
-          <a:prstGeom prst="line">
-            <a:avLst/>
-          </a:prstGeom>
-          <a:noFill/>
-          <a:ln w="9525">
-            <a:solidFill>
-              <a:srgbClr val="D5DAE1"/>
-            </a:solidFill>
-            <a:prstDash val="solid"/>
-          </a:ln>
-        </p:spPr>
-      </p:sp>
-      <p:sp>
-        <p:nvSpPr>
-          <p:cNvPr id="13" name="Text 10"/>
-          <p:cNvSpPr/>
-          <p:nvPr/>
-        </p:nvSpPr>
-        <p:spPr>
-          <a:xfrm>
-            <a:off x="4325112" y="1847088"/>
-            <a:ext cx="3547872" cy="4370832"/>
-          </a:xfrm>
-          <a:prstGeom prst="rect">
-            <a:avLst/>
-          </a:prstGeom>
-          <a:noFill/>
-          <a:ln/>
-        </p:spPr>
-        <p:txBody>
-          <a:bodyPr wrap="square" lIns="25400" tIns="25400" rIns="25400" bIns="25400" rtlCol="0" anchor="t"/>
-          <a:lstStyle/>
+              <a:t>Each ticket becomes a set of words, without stop words.</a:t>
+            </a:r>
+            <a:endParaRPr lang="en-US" sz="1400" dirty="0"/>
+          </a:p>
           <a:p>
             <a:pPr marL="190500" indent="-190500">
               <a:lnSpc>
@@ -4789,7 +3806,7 @@
               <a:buChar char="•"/>
             </a:pPr>
             <a:r>
-              <a:rPr lang="en-US" sz="1600" dirty="0">
+              <a:rPr lang="en-US" sz="1800" dirty="0">
                 <a:solidFill>
                   <a:srgbClr val="26303F"/>
                 </a:solidFill>
@@ -4797,9 +3814,9 @@
                 <a:ea typeface="Calibri" pitchFamily="34" charset="-122"/>
                 <a:cs typeface="Calibri" pitchFamily="34" charset="-120"/>
               </a:rPr>
-              <a:t>Each ticket has a first-response and a resolution timer, counted in all hours or only working hours.</a:t>
-            </a:r>
-            <a:endParaRPr lang="en-US" sz="1600" dirty="0"/>
+              <a:t>Jaccard similarity: shared words ÷ all distinct words.</a:t>
+            </a:r>
+            <a:endParaRPr lang="en-US" sz="1400" dirty="0"/>
           </a:p>
           <a:p>
             <a:pPr marL="190500" indent="-190500">
@@ -4813,7 +3830,7 @@
               <a:buChar char="•"/>
             </a:pPr>
             <a:r>
-              <a:rPr lang="en-US" sz="1600" dirty="0">
+              <a:rPr lang="en-US" sz="1800" dirty="0">
                 <a:solidFill>
                   <a:srgbClr val="26303F"/>
                 </a:solidFill>
@@ -4821,44 +3838,83 @@
                 <a:ea typeface="Calibri" pitchFamily="34" charset="-122"/>
                 <a:cs typeface="Calibri" pitchFamily="34" charset="-120"/>
               </a:rPr>
-              <a:t>A warning is sent at 75 % of the target and a breach is recorded at the deadline, each only once.</a:t>
-            </a:r>
-            <a:endParaRPr lang="en-US" sz="1600" dirty="0"/>
-          </a:p>
-          <a:p>
-            <a:pPr marL="190500" indent="-190500">
-              <a:lnSpc>
-                <a:spcPct val="105000"/>
-              </a:lnSpc>
+              <a:t>Open tickets from the last 30 days scoring 0.35 or more are suggested.</a:t>
+            </a:r>
+            <a:endParaRPr lang="en-US" sz="1400" dirty="0"/>
+          </a:p>
+        </p:txBody>
+      </p:sp>
+      <p:sp>
+        <p:nvSpPr>
+          <p:cNvPr id="16" name="Shape 12"/>
+          <p:cNvSpPr/>
+          <p:nvPr/>
+        </p:nvSpPr>
+        <p:spPr>
+          <a:xfrm>
+            <a:off x="6583680" y="4206240"/>
+            <a:ext cx="5056632" cy="1965960"/>
+          </a:xfrm>
+          <a:prstGeom prst="rect">
+            <a:avLst/>
+          </a:prstGeom>
+          <a:solidFill>
+            <a:srgbClr val="F4F6F9"/>
+          </a:solidFill>
+          <a:ln w="12700">
+            <a:solidFill>
+              <a:srgbClr val="F4F6F9"/>
+            </a:solidFill>
+            <a:prstDash val="solid"/>
+          </a:ln>
+        </p:spPr>
+      </p:sp>
+      <p:sp>
+        <p:nvSpPr>
+          <p:cNvPr id="17" name="Text 13"/>
+          <p:cNvSpPr/>
+          <p:nvPr/>
+        </p:nvSpPr>
+        <p:spPr>
+          <a:xfrm>
+            <a:off x="6766560" y="4316000"/>
+            <a:ext cx="4690872" cy="1746000"/>
+          </a:xfrm>
+          <a:prstGeom prst="rect">
+            <a:avLst/>
+          </a:prstGeom>
+          <a:noFill/>
+          <a:ln/>
+        </p:spPr>
+        <p:txBody>
+          <a:bodyPr wrap="square" lIns="0" tIns="0" rIns="0" bIns="0" rtlCol="0" anchor="t"/>
+          <a:lstStyle/>
+          <a:p>
+            <a:pPr indent="0" marL="0">
               <a:spcAft>
-                <a:spcPts val="1400"/>
+                <a:spcPts val="500"/>
               </a:spcAft>
-              <a:buSzPct val="100000"/>
-              <a:buChar char="•"/>
+              <a:buNone/>
             </a:pPr>
             <a:r>
-              <a:rPr lang="en-US" sz="1600" dirty="0">
+              <a:rPr lang="en-US" sz="1450" dirty="0">
                 <a:solidFill>
-                  <a:srgbClr val="26303F"/>
+                  <a:srgbClr val="14213D"/>
                 </a:solidFill>
-                <a:latin typeface="Calibri" pitchFamily="34" charset="0"/>
-                <a:ea typeface="Calibri" pitchFamily="34" charset="-122"/>
-                <a:cs typeface="Calibri" pitchFamily="34" charset="-120"/>
+                <a:latin typeface="Georgia" pitchFamily="34" charset="0"/>
+                <a:ea typeface="Georgia" pitchFamily="34" charset="-122"/>
+                <a:cs typeface="Georgia" pitchFamily="34" charset="-120"/>
               </a:rPr>
-              <a:t>While a ticket waits for the customer the timer pauses, and the deadline moves by the time paused.</a:t>
-            </a:r>
-            <a:endParaRPr lang="en-US" sz="1600" dirty="0"/>
-          </a:p>
-          <a:p>
-            <a:pPr marL="190500" indent="-190500">
-              <a:lnSpc>
-                <a:spcPct val="105000"/>
-              </a:lnSpc>
+              <a:t>Example</a:t>
+            </a:r>
+            <a:endParaRPr lang="en-US" sz="1350" dirty="0"/>
+          </a:p>
+          <a:p>
+            <a:pPr indent="0" marL="0">
               <a:spcAft>
-                <a:spcPts val="1400"/>
+                <a:spcPts val="300"/>
               </a:spcAft>
-              <a:buSzPct val="100000"/>
-              <a:buChar char="•"/>
+              <a:buNone/>
             </a:pPr>
             <a:r>
               <a:rPr lang="en-US" sz="1600" dirty="0">
@@ -4871,187 +3927,7 @@
               </a:rPr>
               <a:t>An 8-hour target from 09:00, paused 10:00–12:00, ends at 19:00 instead of 17:00.</a:t>
             </a:r>
-            <a:endParaRPr lang="en-US" sz="1600" dirty="0"/>
-          </a:p>
-        </p:txBody>
-      </p:sp>
-      <p:sp>
-        <p:nvSpPr>
-          <p:cNvPr id="14" name="Text 11"/>
-          <p:cNvSpPr/>
-          <p:nvPr/>
-        </p:nvSpPr>
-        <p:spPr>
-          <a:xfrm>
-            <a:off x="8101584" y="1280160"/>
-            <a:ext cx="3547872" cy="384048"/>
-          </a:xfrm>
-          <a:prstGeom prst="rect">
-            <a:avLst/>
-          </a:prstGeom>
-          <a:noFill/>
-          <a:ln/>
-        </p:spPr>
-        <p:txBody>
-          <a:bodyPr wrap="square" lIns="0" tIns="0" rIns="0" bIns="0" rtlCol="0" anchor="b"/>
-          <a:lstStyle/>
-          <a:p>
-            <a:pPr indent="0" marL="0">
-              <a:buNone/>
-            </a:pPr>
-            <a:r>
-              <a:rPr lang="en-US" sz="1700" dirty="0">
-                <a:solidFill>
-                  <a:srgbClr val="14213D"/>
-                </a:solidFill>
-                <a:latin typeface="Georgia" pitchFamily="34" charset="0"/>
-                <a:ea typeface="Georgia" pitchFamily="34" charset="-122"/>
-                <a:cs typeface="Georgia" pitchFamily="34" charset="-120"/>
-              </a:rPr>
-              <a:t>History and time analysis</a:t>
-            </a:r>
-            <a:endParaRPr lang="en-US" sz="1700" dirty="0"/>
-          </a:p>
-        </p:txBody>
-      </p:sp>
-      <p:sp>
-        <p:nvSpPr>
-          <p:cNvPr id="15" name="Shape 12"/>
-          <p:cNvSpPr/>
-          <p:nvPr/>
-        </p:nvSpPr>
-        <p:spPr>
-          <a:xfrm>
-            <a:off x="8101584" y="1737360"/>
-            <a:ext cx="3547872" cy="0"/>
-          </a:xfrm>
-          <a:prstGeom prst="line">
-            <a:avLst/>
-          </a:prstGeom>
-          <a:noFill/>
-          <a:ln w="9525">
-            <a:solidFill>
-              <a:srgbClr val="D5DAE1"/>
-            </a:solidFill>
-            <a:prstDash val="solid"/>
-          </a:ln>
-        </p:spPr>
-      </p:sp>
-      <p:sp>
-        <p:nvSpPr>
-          <p:cNvPr id="16" name="Text 13"/>
-          <p:cNvSpPr/>
-          <p:nvPr/>
-        </p:nvSpPr>
-        <p:spPr>
-          <a:xfrm>
-            <a:off x="8101584" y="1847088"/>
-            <a:ext cx="3547872" cy="4370832"/>
-          </a:xfrm>
-          <a:prstGeom prst="rect">
-            <a:avLst/>
-          </a:prstGeom>
-          <a:noFill/>
-          <a:ln/>
-        </p:spPr>
-        <p:txBody>
-          <a:bodyPr wrap="square" lIns="25400" tIns="25400" rIns="25400" bIns="25400" rtlCol="0" anchor="t"/>
-          <a:lstStyle/>
-          <a:p>
-            <a:pPr marL="190500" indent="-190500">
-              <a:lnSpc>
-                <a:spcPct val="105000"/>
-              </a:lnSpc>
-              <a:spcAft>
-                <a:spcPts val="1400"/>
-              </a:spcAft>
-              <a:buSzPct val="100000"/>
-              <a:buChar char="•"/>
-            </a:pPr>
-            <a:r>
-              <a:rPr lang="en-US" sz="1600" dirty="0">
-                <a:solidFill>
-                  <a:srgbClr val="26303F"/>
-                </a:solidFill>
-                <a:latin typeface="Calibri" pitchFamily="34" charset="0"/>
-                <a:ea typeface="Calibri" pitchFamily="34" charset="-122"/>
-                <a:cs typeface="Calibri" pitchFamily="34" charset="-120"/>
-              </a:rPr>
-              <a:t>A database trigger records every change to the main tables with the old and new values.</a:t>
-            </a:r>
-            <a:endParaRPr lang="en-US" sz="1600" dirty="0"/>
-          </a:p>
-          <a:p>
-            <a:pPr marL="190500" indent="-190500">
-              <a:lnSpc>
-                <a:spcPct val="105000"/>
-              </a:lnSpc>
-              <a:spcAft>
-                <a:spcPts val="1400"/>
-              </a:spcAft>
-              <a:buSzPct val="100000"/>
-              <a:buChar char="•"/>
-            </a:pPr>
-            <a:r>
-              <a:rPr lang="en-US" sz="1600" dirty="0">
-                <a:solidFill>
-                  <a:srgbClr val="26303F"/>
-                </a:solidFill>
-                <a:latin typeface="Calibri" pitchFamily="34" charset="0"/>
-                <a:ea typeface="Calibri" pitchFamily="34" charset="-122"/>
-                <a:cs typeface="Calibri" pitchFamily="34" charset="-120"/>
-              </a:rPr>
-              <a:t>A record at any past moment is rebuilt by undoing, newest first, the changes made after it.</a:t>
-            </a:r>
-            <a:endParaRPr lang="en-US" sz="1600" dirty="0"/>
-          </a:p>
-          <a:p>
-            <a:pPr marL="190500" indent="-190500">
-              <a:lnSpc>
-                <a:spcPct val="105000"/>
-              </a:lnSpc>
-              <a:spcAft>
-                <a:spcPts val="1400"/>
-              </a:spcAft>
-              <a:buSzPct val="100000"/>
-              <a:buChar char="•"/>
-            </a:pPr>
-            <a:r>
-              <a:rPr lang="en-US" sz="1600" dirty="0">
-                <a:solidFill>
-                  <a:srgbClr val="26303F"/>
-                </a:solidFill>
-                <a:latin typeface="Calibri" pitchFamily="34" charset="0"/>
-                <a:ea typeface="Calibri" pitchFamily="34" charset="-122"/>
-                <a:cs typeface="Calibri" pitchFamily="34" charset="-120"/>
-              </a:rPr>
-              <a:t>Each ticket's changes form periods of constant status, agent and priority.</a:t>
-            </a:r>
-            <a:endParaRPr lang="en-US" sz="1600" dirty="0"/>
-          </a:p>
-          <a:p>
-            <a:pPr marL="190500" indent="-190500">
-              <a:lnSpc>
-                <a:spcPct val="105000"/>
-              </a:lnSpc>
-              <a:spcAft>
-                <a:spcPts val="1400"/>
-              </a:spcAft>
-              <a:buSzPct val="100000"/>
-              <a:buChar char="•"/>
-            </a:pPr>
-            <a:r>
-              <a:rPr lang="en-US" sz="1600" dirty="0">
-                <a:solidFill>
-                  <a:srgbClr val="26303F"/>
-                </a:solidFill>
-                <a:latin typeface="Calibri" pitchFamily="34" charset="0"/>
-                <a:ea typeface="Calibri" pitchFamily="34" charset="-122"/>
-                <a:cs typeface="Calibri" pitchFamily="34" charset="-120"/>
-              </a:rPr>
-              <a:t>From these periods come time in status, the backlog on any date and each agent's workload.</a:t>
-            </a:r>
-            <a:endParaRPr lang="en-US" sz="1600" dirty="0"/>
+            <a:endParaRPr lang="en-US" sz="1350" dirty="0"/>
           </a:p>
         </p:txBody>
       </p:sp>
@@ -6929,7 +5805,7 @@
       </p:sp>
       <p:sp>
         <p:nvSpPr>
-          <p:cNvPr id="13" name="Shape 8"/>
+          <p:cNvPr id="1000" name="Shape 8"/>
           <p:cNvSpPr/>
           <p:nvPr/>
         </p:nvSpPr>
@@ -12956,7 +11832,7 @@
       </p:sp>
       <p:sp>
         <p:nvSpPr>
-          <p:cNvPr id="14" name="Text 8"/>
+          <p:cNvPr id="1000" name="Text 8"/>
           <p:cNvSpPr/>
           <p:nvPr/>
         </p:nvSpPr>
@@ -14103,55 +12979,13 @@
       </p:sp>
       <p:sp>
         <p:nvSpPr>
-          <p:cNvPr id="8" name="Text 5"/>
-          <p:cNvSpPr/>
-          <p:nvPr/>
-        </p:nvSpPr>
-        <p:spPr>
-          <a:xfrm>
-            <a:off x="548640" y="1371600"/>
-            <a:ext cx="5760720" cy="1143000"/>
-          </a:xfrm>
-          <a:prstGeom prst="rect">
-            <a:avLst/>
-          </a:prstGeom>
-          <a:noFill/>
-          <a:ln/>
-        </p:spPr>
-        <p:txBody>
-          <a:bodyPr wrap="square" lIns="0" tIns="0" rIns="0" bIns="0" rtlCol="0" anchor="t"/>
-          <a:lstStyle/>
-          <a:p>
-            <a:pPr indent="0" marL="0">
-              <a:lnSpc>
-                <a:spcPct val="105000"/>
-              </a:lnSpc>
-              <a:buNone/>
-            </a:pPr>
-            <a:r>
-              <a:rPr lang="en-US" sz="1600" i="1" dirty="0">
-                <a:solidFill>
-                  <a:srgbClr val="66707F"/>
-                </a:solidFill>
-                <a:latin typeface="Calibri" pitchFamily="34" charset="0"/>
-                <a:ea typeface="Calibri" pitchFamily="34" charset="-122"/>
-                <a:cs typeface="Calibri" pitchFamily="34" charset="-120"/>
-              </a:rPr>
-              <a:t>Every organisation receives requests: a login that fails, an invoice that is wrong, a server that is down. A helpdesk turns them into tickets that can be prioritised, assigned, tracked against a promised response time and closed.</a:t>
-            </a:r>
-            <a:endParaRPr lang="en-US" sz="1600" dirty="0"/>
-          </a:p>
-        </p:txBody>
-      </p:sp>
-      <p:sp>
-        <p:nvSpPr>
           <p:cNvPr id="9" name="Text 6"/>
           <p:cNvSpPr/>
           <p:nvPr/>
         </p:nvSpPr>
         <p:spPr>
           <a:xfrm>
-            <a:off x="548640" y="2606040"/>
+            <a:off x="548640" y="2069402"/>
             <a:ext cx="5760720" cy="3657600"/>
           </a:xfrm>
           <a:prstGeom prst="rect">
@@ -15497,7 +14331,7 @@
               <a:buNone/>
             </a:pPr>
             <a:r>
-              <a:rPr lang="en-US" sz="1450" dirty="0">
+              <a:rPr lang="en-US" sz="1600" dirty="0">
                 <a:solidFill>
                   <a:srgbClr val="26303F"/>
                 </a:solidFill>
@@ -15505,7 +14339,7 @@
                 <a:ea typeface="Calibri" pitchFamily="34" charset="-122"/>
                 <a:cs typeface="Calibri" pitchFamily="34" charset="-120"/>
               </a:rPr>
-              <a:t>Design and implement a multi-tenant helpdesk in which each organisation's data is strictly isolated, and which runs on any virtual machine or on an organisation's own server.</a:t>
+              <a:t>Build a multi-tenant helpdesk with strictly isolated data per organisation.</a:t>
             </a:r>
             <a:endParaRPr lang="en-US" sz="1450" dirty="0"/>
           </a:p>
@@ -15578,7 +14412,7 @@
               <a:buNone/>
             </a:pPr>
             <a:r>
-              <a:rPr lang="en-US" sz="1450" dirty="0">
+              <a:rPr lang="en-US" sz="1600" dirty="0">
                 <a:solidFill>
                   <a:srgbClr val="26303F"/>
                 </a:solidFill>
@@ -15586,7 +14420,7 @@
                 <a:ea typeface="Calibri" pitchFamily="34" charset="-122"/>
                 <a:cs typeface="Calibri" pitchFamily="34" charset="-120"/>
               </a:rPr>
-              <a:t>Implement simple, explainable algorithms for priority scoring, agent assignment, duplicate ticket detection and SLA monitoring with working-hours calendars.</a:t>
+              <a:t>Implement explainable algorithms for priority, assignment, duplicates and SLA monitoring.</a:t>
             </a:r>
             <a:endParaRPr lang="en-US" sz="1450" dirty="0"/>
           </a:p>
@@ -15659,7 +14493,7 @@
               <a:buNone/>
             </a:pPr>
             <a:r>
-              <a:rPr lang="en-US" sz="1450" dirty="0">
+              <a:rPr lang="en-US" sz="1600" dirty="0">
                 <a:solidFill>
                   <a:srgbClr val="26303F"/>
                 </a:solidFill>
@@ -15667,7 +14501,7 @@
                 <a:ea typeface="Calibri" pitchFamily="34" charset="-122"/>
                 <a:cs typeface="Calibri" pitchFamily="34" charset="-120"/>
               </a:rPr>
-              <a:t>Provide the features needed for real use: the ticket lifecycle with replies and internal notes, a media library, email notifications and email-to-ticket, a dashboard, an audit trail, a REST API and signed webhooks.</a:t>
+              <a:t>Provide ticket lifecycle, email, media library, dashboard, REST API and webhooks.</a:t>
             </a:r>
             <a:endParaRPr lang="en-US" sz="1450" dirty="0"/>
           </a:p>
@@ -15740,7 +14574,7 @@
               <a:buNone/>
             </a:pPr>
             <a:r>
-              <a:rPr lang="en-US" sz="1450" dirty="0">
+              <a:rPr lang="en-US" sz="1600" dirty="0">
                 <a:solidFill>
                   <a:srgbClr val="26303F"/>
                 </a:solidFill>
@@ -15748,7 +14582,7 @@
                 <a:ea typeface="Calibri" pitchFamily="34" charset="-122"/>
                 <a:cs typeface="Calibri" pitchFamily="34" charset="-120"/>
               </a:rPr>
-              <a:t>Build a reporting module that records every change to the main records and shows any record as it was at a past moment.</a:t>
+              <a:t>Record every change and show any record as at a past moment.</a:t>
             </a:r>
             <a:endParaRPr lang="en-US" sz="1450" dirty="0"/>
           </a:p>
@@ -15842,13 +14676,13 @@
                 <a:spcPct val="105000"/>
               </a:lnSpc>
               <a:spcAft>
-                <a:spcPts val="300"/>
+                <a:spcPts val="1200"/>
               </a:spcAft>
               <a:buSzPct val="100000"/>
               <a:buChar char="•"/>
             </a:pPr>
             <a:r>
-              <a:rPr lang="en-US" sz="1400" dirty="0">
+              <a:rPr lang="en-US" sz="1600" dirty="0">
                 <a:solidFill>
                   <a:srgbClr val="26303F"/>
                 </a:solidFill>
@@ -15866,85 +14700,13 @@
                 <a:spcPct val="105000"/>
               </a:lnSpc>
               <a:spcAft>
-                <a:spcPts val="300"/>
+                <a:spcPts val="1200"/>
               </a:spcAft>
               <a:buSzPct val="100000"/>
               <a:buChar char="•"/>
             </a:pPr>
             <a:r>
-              <a:rPr lang="en-US" sz="1400" dirty="0">
-                <a:solidFill>
-                  <a:srgbClr val="26303F"/>
-                </a:solidFill>
-                <a:latin typeface="Calibri" pitchFamily="34" charset="0"/>
-                <a:ea typeface="Calibri" pitchFamily="34" charset="-122"/>
-                <a:cs typeface="Calibri" pitchFamily="34" charset="-120"/>
-              </a:rPr>
-              <a:t>Sign-in, invitations, roles and permissions in each workspace</a:t>
-            </a:r>
-            <a:endParaRPr lang="en-US" sz="1400" dirty="0"/>
-          </a:p>
-          <a:p>
-            <a:pPr marL="190500" indent="-190500">
-              <a:lnSpc>
-                <a:spcPct val="105000"/>
-              </a:lnSpc>
-              <a:spcAft>
-                <a:spcPts val="300"/>
-              </a:spcAft>
-              <a:buSzPct val="100000"/>
-              <a:buChar char="•"/>
-            </a:pPr>
-            <a:r>
-              <a:rPr lang="en-US" sz="1400" dirty="0">
-                <a:solidFill>
-                  <a:srgbClr val="26303F"/>
-                </a:solidFill>
-                <a:latin typeface="Calibri" pitchFamily="34" charset="0"/>
-                <a:ea typeface="Calibri" pitchFamily="34" charset="-122"/>
-                <a:cs typeface="Calibri" pitchFamily="34" charset="-120"/>
-              </a:rPr>
-              <a:t>Contacts and organisations with customer tiers</a:t>
-            </a:r>
-            <a:endParaRPr lang="en-US" sz="1400" dirty="0"/>
-          </a:p>
-          <a:p>
-            <a:pPr marL="190500" indent="-190500">
-              <a:lnSpc>
-                <a:spcPct val="105000"/>
-              </a:lnSpc>
-              <a:spcAft>
-                <a:spcPts val="300"/>
-              </a:spcAft>
-              <a:buSzPct val="100000"/>
-              <a:buChar char="•"/>
-            </a:pPr>
-            <a:r>
-              <a:rPr lang="en-US" sz="1400" dirty="0">
-                <a:solidFill>
-                  <a:srgbClr val="26303F"/>
-                </a:solidFill>
-                <a:latin typeface="Calibri" pitchFamily="34" charset="0"/>
-                <a:ea typeface="Calibri" pitchFamily="34" charset="-122"/>
-                <a:cs typeface="Calibri" pitchFamily="34" charset="-120"/>
-              </a:rPr>
-              <a:t>Teams, skills, categories, agent capacity and shifts</a:t>
-            </a:r>
-            <a:endParaRPr lang="en-US" sz="1400" dirty="0"/>
-          </a:p>
-          <a:p>
-            <a:pPr marL="190500" indent="-190500">
-              <a:lnSpc>
-                <a:spcPct val="105000"/>
-              </a:lnSpc>
-              <a:spcAft>
-                <a:spcPts val="300"/>
-              </a:spcAft>
-              <a:buSzPct val="100000"/>
-              <a:buChar char="•"/>
-            </a:pPr>
-            <a:r>
-              <a:rPr lang="en-US" sz="1400" dirty="0">
+              <a:rPr lang="en-US" sz="1600" dirty="0">
                 <a:solidFill>
                   <a:srgbClr val="26303F"/>
                 </a:solidFill>
@@ -15962,13 +14724,13 @@
                 <a:spcPct val="105000"/>
               </a:lnSpc>
               <a:spcAft>
-                <a:spcPts val="300"/>
+                <a:spcPts val="1200"/>
               </a:spcAft>
               <a:buSzPct val="100000"/>
               <a:buChar char="•"/>
             </a:pPr>
             <a:r>
-              <a:rPr lang="en-US" sz="1400" dirty="0">
+              <a:rPr lang="en-US" sz="1600" dirty="0">
                 <a:solidFill>
                   <a:srgbClr val="26303F"/>
                 </a:solidFill>
@@ -15986,13 +14748,13 @@
                 <a:spcPct val="105000"/>
               </a:lnSpc>
               <a:spcAft>
-                <a:spcPts val="300"/>
+                <a:spcPts val="1200"/>
               </a:spcAft>
               <a:buSzPct val="100000"/>
               <a:buChar char="•"/>
             </a:pPr>
             <a:r>
-              <a:rPr lang="en-US" sz="1400" dirty="0">
+              <a:rPr lang="en-US" sz="1600" dirty="0">
                 <a:solidFill>
                   <a:srgbClr val="26303F"/>
                 </a:solidFill>
@@ -16010,37 +14772,13 @@
                 <a:spcPct val="105000"/>
               </a:lnSpc>
               <a:spcAft>
-                <a:spcPts val="300"/>
+                <a:spcPts val="1200"/>
               </a:spcAft>
               <a:buSzPct val="100000"/>
               <a:buChar char="•"/>
             </a:pPr>
             <a:r>
-              <a:rPr lang="en-US" sz="1400" dirty="0">
-                <a:solidFill>
-                  <a:srgbClr val="26303F"/>
-                </a:solidFill>
-                <a:latin typeface="Calibri" pitchFamily="34" charset="0"/>
-                <a:ea typeface="Calibri" pitchFamily="34" charset="-122"/>
-                <a:cs typeface="Calibri" pitchFamily="34" charset="-120"/>
-              </a:rPr>
-              <a:t>Notifications, email-to-ticket and a media library</a:t>
-            </a:r>
-            <a:endParaRPr lang="en-US" sz="1400" dirty="0"/>
-          </a:p>
-          <a:p>
-            <a:pPr marL="190500" indent="-190500">
-              <a:lnSpc>
-                <a:spcPct val="105000"/>
-              </a:lnSpc>
-              <a:spcAft>
-                <a:spcPts val="300"/>
-              </a:spcAft>
-              <a:buSzPct val="100000"/>
-              <a:buChar char="•"/>
-            </a:pPr>
-            <a:r>
-              <a:rPr lang="en-US" sz="1400" dirty="0">
+              <a:rPr lang="en-US" sz="1600" dirty="0">
                 <a:solidFill>
                   <a:srgbClr val="26303F"/>
                 </a:solidFill>
@@ -16049,54 +14787,6 @@
                 <a:cs typeface="Calibri" pitchFamily="34" charset="-120"/>
               </a:rPr>
               <a:t>Dashboard and reports with drill-down and past views</a:t>
-            </a:r>
-            <a:endParaRPr lang="en-US" sz="1400" dirty="0"/>
-          </a:p>
-          <a:p>
-            <a:pPr marL="190500" indent="-190500">
-              <a:lnSpc>
-                <a:spcPct val="105000"/>
-              </a:lnSpc>
-              <a:spcAft>
-                <a:spcPts val="300"/>
-              </a:spcAft>
-              <a:buSzPct val="100000"/>
-              <a:buChar char="•"/>
-            </a:pPr>
-            <a:r>
-              <a:rPr lang="en-US" sz="1400" dirty="0">
-                <a:solidFill>
-                  <a:srgbClr val="26303F"/>
-                </a:solidFill>
-                <a:latin typeface="Calibri" pitchFamily="34" charset="0"/>
-                <a:ea typeface="Calibri" pitchFamily="34" charset="-122"/>
-                <a:cs typeface="Calibri" pitchFamily="34" charset="-120"/>
-              </a:rPr>
-              <a:t>REST API with client credentials and signed webhooks</a:t>
-            </a:r>
-            <a:endParaRPr lang="en-US" sz="1400" dirty="0"/>
-          </a:p>
-          <a:p>
-            <a:pPr marL="190500" indent="-190500">
-              <a:lnSpc>
-                <a:spcPct val="105000"/>
-              </a:lnSpc>
-              <a:spcAft>
-                <a:spcPts val="300"/>
-              </a:spcAft>
-              <a:buSzPct val="100000"/>
-              <a:buChar char="•"/>
-            </a:pPr>
-            <a:r>
-              <a:rPr lang="en-US" sz="1400" dirty="0">
-                <a:solidFill>
-                  <a:srgbClr val="26303F"/>
-                </a:solidFill>
-                <a:latin typeface="Calibri" pitchFamily="34" charset="0"/>
-                <a:ea typeface="Calibri" pitchFamily="34" charset="-122"/>
-                <a:cs typeface="Calibri" pitchFamily="34" charset="-120"/>
-              </a:rPr>
-              <a:t>Light and dark themes; deployment with Docker on AWS</a:t>
             </a:r>
             <a:endParaRPr lang="en-US" sz="1400" dirty="0"/>
           </a:p>
@@ -16396,7 +15086,7 @@
         <p:spPr>
           <a:xfrm>
             <a:off x="6035040" y="1371600"/>
-            <a:ext cx="5605272" cy="960120"/>
+            <a:ext cx="5605272" cy="457200"/>
           </a:xfrm>
           <a:prstGeom prst="rect">
             <a:avLst/>
@@ -16423,7 +15113,7 @@
                 <a:ea typeface="Calibri" pitchFamily="34" charset="-122"/>
                 <a:cs typeface="Calibri" pitchFamily="34" charset="-120"/>
               </a:rPr>
-              <a:t>We followed the waterfall model. The requirements were known at the start and the project had a fixed period of three months, so each phase was finished and reviewed before the next one began.</a:t>
+              <a:t>We followed the waterfall model, one phase after another.</a:t>
             </a:r>
             <a:endParaRPr lang="en-US" sz="1500" dirty="0"/>
           </a:p>
@@ -16431,7 +15121,7 @@
       </p:sp>
       <p:graphicFrame>
         <p:nvGraphicFramePr>
-          <p:cNvPr id="6" name="Table 0"/>
+          <p:cNvPr id="1000" name="Table 0"/>
           <p:cNvGraphicFramePr>
             <a:graphicFrameLocks noGrp="1"/>
           </p:cNvGraphicFramePr>
@@ -16444,7 +15134,7 @@
           </p:nvPr>
         </p:nvGraphicFramePr>
         <p:xfrm>
-          <a:off x="6035040" y="2468880"/>
+          <a:off x="6035040" y="1965960"/>
           <a:ext cx="5605272" cy="914400"/>
         </p:xfrm>
         <a:graphic>
@@ -17704,7 +16394,7 @@
         </p:nvSpPr>
         <p:spPr>
           <a:xfrm>
-            <a:off x="6035040" y="5257800"/>
+            <a:off x="6035040" y="4754880"/>
             <a:ext cx="5605272" cy="822960"/>
           </a:xfrm>
           <a:prstGeom prst="rect">
@@ -17941,7 +16631,7 @@
         <p:spPr>
           <a:xfrm>
             <a:off x="548640" y="1371600"/>
-            <a:ext cx="4389120" cy="365760"/>
+            <a:ext cx="11091672" cy="365760"/>
           </a:xfrm>
           <a:prstGeom prst="rect">
             <a:avLst/>
@@ -17980,7 +16670,7 @@
         <p:spPr>
           <a:xfrm>
             <a:off x="548640" y="1828800"/>
-            <a:ext cx="4389120" cy="4389120"/>
+            <a:ext cx="11091672" cy="4389120"/>
           </a:xfrm>
           <a:prstGeom prst="rect">
             <a:avLst/>
@@ -17997,13 +16687,13 @@
                 <a:spcPct val="105000"/>
               </a:lnSpc>
               <a:spcAft>
-                <a:spcPts val="800"/>
+                <a:spcPts val="2200"/>
               </a:spcAft>
               <a:buSzPct val="100000"/>
               <a:buChar char="•"/>
             </a:pPr>
             <a:r>
-              <a:rPr lang="en-US" sz="1400" b="1" dirty="0">
+              <a:rPr lang="en-US" sz="2000" b="1" dirty="0">
                 <a:solidFill>
                   <a:srgbClr val="14213D"/>
                 </a:solidFill>
@@ -18014,7 +16704,7 @@
               <a:t>Priority</a:t>
             </a:r>
             <a:r>
-              <a:rPr lang="en-US" sz="1400" dirty="0">
+              <a:rPr lang="en-US" sz="2000" dirty="0">
                 <a:solidFill>
                   <a:srgbClr val="26303F"/>
                 </a:solidFill>
@@ -18032,13 +16722,13 @@
                 <a:spcPct val="105000"/>
               </a:lnSpc>
               <a:spcAft>
-                <a:spcPts val="800"/>
+                <a:spcPts val="2200"/>
               </a:spcAft>
               <a:buSzPct val="100000"/>
               <a:buChar char="•"/>
             </a:pPr>
             <a:r>
-              <a:rPr lang="en-US" sz="1400" b="1" dirty="0">
+              <a:rPr lang="en-US" sz="2000" b="1" dirty="0">
                 <a:solidFill>
                   <a:srgbClr val="14213D"/>
                 </a:solidFill>
@@ -18049,7 +16739,7 @@
               <a:t>Simple additive weighting</a:t>
             </a:r>
             <a:r>
-              <a:rPr lang="en-US" sz="1400" dirty="0">
+              <a:rPr lang="en-US" sz="2000" dirty="0">
                 <a:solidFill>
                   <a:srgbClr val="26303F"/>
                 </a:solidFill>
@@ -18067,13 +16757,13 @@
                 <a:spcPct val="105000"/>
               </a:lnSpc>
               <a:spcAft>
-                <a:spcPts val="800"/>
+                <a:spcPts val="2200"/>
               </a:spcAft>
               <a:buSzPct val="100000"/>
               <a:buChar char="•"/>
             </a:pPr>
             <a:r>
-              <a:rPr lang="en-US" sz="1400" b="1" dirty="0">
+              <a:rPr lang="en-US" sz="2000" b="1" dirty="0">
                 <a:solidFill>
                   <a:srgbClr val="14213D"/>
                 </a:solidFill>
@@ -18084,7 +16774,7 @@
               <a:t>Least-loaded routing</a:t>
             </a:r>
             <a:r>
-              <a:rPr lang="en-US" sz="1400" dirty="0">
+              <a:rPr lang="en-US" sz="2000" dirty="0">
                 <a:solidFill>
                   <a:srgbClr val="26303F"/>
                 </a:solidFill>
@@ -18102,13 +16792,13 @@
                 <a:spcPct val="105000"/>
               </a:lnSpc>
               <a:spcAft>
-                <a:spcPts val="800"/>
+                <a:spcPts val="2200"/>
               </a:spcAft>
               <a:buSzPct val="100000"/>
               <a:buChar char="•"/>
             </a:pPr>
             <a:r>
-              <a:rPr lang="en-US" sz="1400" b="1" dirty="0">
+              <a:rPr lang="en-US" sz="2000" b="1" dirty="0">
                 <a:solidFill>
                   <a:srgbClr val="14213D"/>
                 </a:solidFill>
@@ -18119,7 +16809,7 @@
               <a:t>Jaccard similarity</a:t>
             </a:r>
             <a:r>
-              <a:rPr lang="en-US" sz="1400" dirty="0">
+              <a:rPr lang="en-US" sz="2000" dirty="0">
                 <a:solidFill>
                   <a:srgbClr val="26303F"/>
                 </a:solidFill>
@@ -18137,13 +16827,13 @@
                 <a:spcPct val="105000"/>
               </a:lnSpc>
               <a:spcAft>
-                <a:spcPts val="800"/>
+                <a:spcPts val="2200"/>
               </a:spcAft>
               <a:buSzPct val="100000"/>
               <a:buChar char="•"/>
             </a:pPr>
             <a:r>
-              <a:rPr lang="en-US" sz="1400" b="1" dirty="0">
+              <a:rPr lang="en-US" sz="2000" b="1" dirty="0">
                 <a:solidFill>
                   <a:srgbClr val="14213D"/>
                 </a:solidFill>
@@ -18154,7 +16844,7 @@
               <a:t>Row-level security</a:t>
             </a:r>
             <a:r>
-              <a:rPr lang="en-US" sz="1400" dirty="0">
+              <a:rPr lang="en-US" sz="2000" dirty="0">
                 <a:solidFill>
                   <a:srgbClr val="26303F"/>
                 </a:solidFill>
@@ -18165,1864 +16855,6 @@
               <a:t> in PostgreSQL lets the database itself keep tenants apart.</a:t>
             </a:r>
             <a:endParaRPr lang="en-US" sz="1400" dirty="0"/>
-          </a:p>
-        </p:txBody>
-      </p:sp>
-      <p:sp>
-        <p:nvSpPr>
-          <p:cNvPr id="10" name="Shape 7"/>
-          <p:cNvSpPr/>
-          <p:nvPr/>
-        </p:nvSpPr>
-        <p:spPr>
-          <a:xfrm>
-            <a:off x="5212080" y="1417320"/>
-            <a:ext cx="0" cy="4754880"/>
-          </a:xfrm>
-          <a:prstGeom prst="line">
-            <a:avLst/>
-          </a:prstGeom>
-          <a:noFill/>
-          <a:ln w="9525">
-            <a:solidFill>
-              <a:srgbClr val="D5DAE1"/>
-            </a:solidFill>
-            <a:prstDash val="solid"/>
-          </a:ln>
-        </p:spPr>
-      </p:sp>
-      <p:sp>
-        <p:nvSpPr>
-          <p:cNvPr id="11" name="Text 8"/>
-          <p:cNvSpPr/>
-          <p:nvPr/>
-        </p:nvSpPr>
-        <p:spPr>
-          <a:xfrm>
-            <a:off x="5486400" y="1371600"/>
-            <a:ext cx="6126480" cy="365760"/>
-          </a:xfrm>
-          <a:prstGeom prst="rect">
-            <a:avLst/>
-          </a:prstGeom>
-          <a:noFill/>
-          <a:ln/>
-        </p:spPr>
-        <p:txBody>
-          <a:bodyPr wrap="square" lIns="0" tIns="0" rIns="0" bIns="0" rtlCol="0" anchor="ctr"/>
-          <a:lstStyle/>
-          <a:p>
-            <a:pPr indent="0" marL="0">
-              <a:buNone/>
-            </a:pPr>
-            <a:r>
-              <a:rPr lang="en-US" sz="1700" dirty="0">
-                <a:solidFill>
-                  <a:srgbClr val="14213D"/>
-                </a:solidFill>
-                <a:latin typeface="Georgia" pitchFamily="34" charset="0"/>
-                <a:ea typeface="Georgia" pitchFamily="34" charset="-122"/>
-                <a:cs typeface="Georgia" pitchFamily="34" charset="-120"/>
-              </a:rPr>
-              <a:t>Existing open-source helpdesks</a:t>
-            </a:r>
-            <a:endParaRPr lang="en-US" sz="1700" dirty="0"/>
-          </a:p>
-        </p:txBody>
-      </p:sp>
-      <p:graphicFrame>
-        <p:nvGraphicFramePr>
-          <p:cNvPr id="7" name="Table 0"/>
-          <p:cNvGraphicFramePr>
-            <a:graphicFrameLocks noGrp="1"/>
-          </p:cNvGraphicFramePr>
-          <p:nvPr>
-            <p:extLst>
-              <p:ext uri="{D42A27DB-BD31-4B8C-83A1-F6EECF244321}">
-                <p14:modId xmlns:p14="http://schemas.microsoft.com/office/powerpoint/2010/main" val="1579011935"/>
-              </p:ext>
-            </p:extLst>
-          </p:nvPr>
-        </p:nvGraphicFramePr>
-        <p:xfrm>
-          <a:off x="5486400" y="1828800"/>
-          <a:ext cx="6153912" cy="914400"/>
-        </p:xfrm>
-        <a:graphic>
-          <a:graphicData uri="http://schemas.openxmlformats.org/drawingml/2006/table">
-            <a:tbl>
-              <a:tblPr/>
-              <a:tblGrid>
-                <a:gridCol w="1005840"/>
-                <a:gridCol w="1371600"/>
-                <a:gridCol w="1508760"/>
-                <a:gridCol w="987552"/>
-                <a:gridCol w="1280160"/>
-              </a:tblGrid>
-              <a:tr h="475488">
-                <a:tc>
-                  <a:txBody>
-                    <a:bodyPr/>
-                    <a:lstStyle/>
-                    <a:p>
-                      <a:pPr indent="0" marL="0">
-                        <a:buNone/>
-                      </a:pPr>
-                      <a:r>
-                        <a:rPr lang="en-US" sz="1200" b="1" dirty="0">
-                          <a:solidFill>
-                            <a:srgbClr val="FFFFFF"/>
-                          </a:solidFill>
-                          <a:latin typeface="Calibri" pitchFamily="34" charset="0"/>
-                          <a:ea typeface="Calibri" pitchFamily="34" charset="-122"/>
-                          <a:cs typeface="Calibri" pitchFamily="34" charset="-120"/>
-                        </a:rPr>
-                        <a:t>System</a:t>
-                      </a:r>
-                      <a:endParaRPr lang="en-US" sz="1200" dirty="0">
-                        <a:latin typeface="Calibri" charset="0"/>
-                        <a:ea typeface="Calibri" charset="0"/>
-                        <a:cs typeface="Calibri" charset="0"/>
-                      </a:endParaRPr>
-                    </a:p>
-                  </a:txBody>
-                  <a:tcPr marL="76200" marR="76200" marT="25400" marB="25400" anchor="ctr">
-                    <a:lnL w="9525" cap="flat" cmpd="sng" algn="ctr">
-                      <a:solidFill>
-                        <a:srgbClr val="D5DAE1"/>
-                      </a:solidFill>
-                      <a:prstDash val="solid"/>
-                      <a:round/>
-                      <a:headEnd type="none" w="med" len="med"/>
-                      <a:tailEnd type="none" w="med" len="med"/>
-                    </a:lnL>
-                    <a:lnR w="9525" cap="flat" cmpd="sng" algn="ctr">
-                      <a:solidFill>
-                        <a:srgbClr val="D5DAE1"/>
-                      </a:solidFill>
-                      <a:prstDash val="solid"/>
-                      <a:round/>
-                      <a:headEnd type="none" w="med" len="med"/>
-                      <a:tailEnd type="none" w="med" len="med"/>
-                    </a:lnR>
-                    <a:lnT w="9525" cap="flat" cmpd="sng" algn="ctr">
-                      <a:solidFill>
-                        <a:srgbClr val="D5DAE1"/>
-                      </a:solidFill>
-                      <a:prstDash val="solid"/>
-                      <a:round/>
-                      <a:headEnd type="none" w="med" len="med"/>
-                      <a:tailEnd type="none" w="med" len="med"/>
-                    </a:lnT>
-                    <a:lnB w="9525" cap="flat" cmpd="sng" algn="ctr">
-                      <a:solidFill>
-                        <a:srgbClr val="D5DAE1"/>
-                      </a:solidFill>
-                      <a:prstDash val="solid"/>
-                      <a:round/>
-                      <a:headEnd type="none" w="med" len="med"/>
-                      <a:tailEnd type="none" w="med" len="med"/>
-                    </a:lnB>
-                    <a:solidFill>
-                      <a:srgbClr val="14213D"/>
-                    </a:solidFill>
-                  </a:tcPr>
-                </a:tc>
-                <a:tc>
-                  <a:txBody>
-                    <a:bodyPr/>
-                    <a:lstStyle/>
-                    <a:p>
-                      <a:pPr indent="0" marL="0">
-                        <a:buNone/>
-                      </a:pPr>
-                      <a:r>
-                        <a:rPr lang="en-US" sz="1200" b="1" dirty="0">
-                          <a:solidFill>
-                            <a:srgbClr val="FFFFFF"/>
-                          </a:solidFill>
-                          <a:latin typeface="Calibri" pitchFamily="34" charset="0"/>
-                          <a:ea typeface="Calibri" pitchFamily="34" charset="-122"/>
-                          <a:cs typeface="Calibri" pitchFamily="34" charset="-120"/>
-                        </a:rPr>
-                        <a:t>Priority</a:t>
-                      </a:r>
-                      <a:endParaRPr lang="en-US" sz="1200" dirty="0">
-                        <a:latin typeface="Calibri" charset="0"/>
-                        <a:ea typeface="Calibri" charset="0"/>
-                        <a:cs typeface="Calibri" charset="0"/>
-                      </a:endParaRPr>
-                    </a:p>
-                  </a:txBody>
-                  <a:tcPr marL="76200" marR="76200" marT="25400" marB="25400" anchor="ctr">
-                    <a:lnL w="9525" cap="flat" cmpd="sng" algn="ctr">
-                      <a:solidFill>
-                        <a:srgbClr val="D5DAE1"/>
-                      </a:solidFill>
-                      <a:prstDash val="solid"/>
-                      <a:round/>
-                      <a:headEnd type="none" w="med" len="med"/>
-                      <a:tailEnd type="none" w="med" len="med"/>
-                    </a:lnL>
-                    <a:lnR w="9525" cap="flat" cmpd="sng" algn="ctr">
-                      <a:solidFill>
-                        <a:srgbClr val="D5DAE1"/>
-                      </a:solidFill>
-                      <a:prstDash val="solid"/>
-                      <a:round/>
-                      <a:headEnd type="none" w="med" len="med"/>
-                      <a:tailEnd type="none" w="med" len="med"/>
-                    </a:lnR>
-                    <a:lnT w="9525" cap="flat" cmpd="sng" algn="ctr">
-                      <a:solidFill>
-                        <a:srgbClr val="D5DAE1"/>
-                      </a:solidFill>
-                      <a:prstDash val="solid"/>
-                      <a:round/>
-                      <a:headEnd type="none" w="med" len="med"/>
-                      <a:tailEnd type="none" w="med" len="med"/>
-                    </a:lnT>
-                    <a:lnB w="9525" cap="flat" cmpd="sng" algn="ctr">
-                      <a:solidFill>
-                        <a:srgbClr val="D5DAE1"/>
-                      </a:solidFill>
-                      <a:prstDash val="solid"/>
-                      <a:round/>
-                      <a:headEnd type="none" w="med" len="med"/>
-                      <a:tailEnd type="none" w="med" len="med"/>
-                    </a:lnB>
-                    <a:solidFill>
-                      <a:srgbClr val="14213D"/>
-                    </a:solidFill>
-                  </a:tcPr>
-                </a:tc>
-                <a:tc>
-                  <a:txBody>
-                    <a:bodyPr/>
-                    <a:lstStyle/>
-                    <a:p>
-                      <a:pPr indent="0" marL="0">
-                        <a:buNone/>
-                      </a:pPr>
-                      <a:r>
-                        <a:rPr lang="en-US" sz="1200" b="1" dirty="0">
-                          <a:solidFill>
-                            <a:srgbClr val="FFFFFF"/>
-                          </a:solidFill>
-                          <a:latin typeface="Calibri" pitchFamily="34" charset="0"/>
-                          <a:ea typeface="Calibri" pitchFamily="34" charset="-122"/>
-                          <a:cs typeface="Calibri" pitchFamily="34" charset="-120"/>
-                        </a:rPr>
-                        <a:t>Assignment</a:t>
-                      </a:r>
-                      <a:endParaRPr lang="en-US" sz="1200" dirty="0">
-                        <a:latin typeface="Calibri" charset="0"/>
-                        <a:ea typeface="Calibri" charset="0"/>
-                        <a:cs typeface="Calibri" charset="0"/>
-                      </a:endParaRPr>
-                    </a:p>
-                  </a:txBody>
-                  <a:tcPr marL="76200" marR="76200" marT="25400" marB="25400" anchor="ctr">
-                    <a:lnL w="9525" cap="flat" cmpd="sng" algn="ctr">
-                      <a:solidFill>
-                        <a:srgbClr val="D5DAE1"/>
-                      </a:solidFill>
-                      <a:prstDash val="solid"/>
-                      <a:round/>
-                      <a:headEnd type="none" w="med" len="med"/>
-                      <a:tailEnd type="none" w="med" len="med"/>
-                    </a:lnL>
-                    <a:lnR w="9525" cap="flat" cmpd="sng" algn="ctr">
-                      <a:solidFill>
-                        <a:srgbClr val="D5DAE1"/>
-                      </a:solidFill>
-                      <a:prstDash val="solid"/>
-                      <a:round/>
-                      <a:headEnd type="none" w="med" len="med"/>
-                      <a:tailEnd type="none" w="med" len="med"/>
-                    </a:lnR>
-                    <a:lnT w="9525" cap="flat" cmpd="sng" algn="ctr">
-                      <a:solidFill>
-                        <a:srgbClr val="D5DAE1"/>
-                      </a:solidFill>
-                      <a:prstDash val="solid"/>
-                      <a:round/>
-                      <a:headEnd type="none" w="med" len="med"/>
-                      <a:tailEnd type="none" w="med" len="med"/>
-                    </a:lnT>
-                    <a:lnB w="9525" cap="flat" cmpd="sng" algn="ctr">
-                      <a:solidFill>
-                        <a:srgbClr val="D5DAE1"/>
-                      </a:solidFill>
-                      <a:prstDash val="solid"/>
-                      <a:round/>
-                      <a:headEnd type="none" w="med" len="med"/>
-                      <a:tailEnd type="none" w="med" len="med"/>
-                    </a:lnB>
-                    <a:solidFill>
-                      <a:srgbClr val="14213D"/>
-                    </a:solidFill>
-                  </a:tcPr>
-                </a:tc>
-                <a:tc>
-                  <a:txBody>
-                    <a:bodyPr/>
-                    <a:lstStyle/>
-                    <a:p>
-                      <a:pPr indent="0" marL="0">
-                        <a:buNone/>
-                      </a:pPr>
-                      <a:r>
-                        <a:rPr lang="en-US" sz="1200" b="1" dirty="0">
-                          <a:solidFill>
-                            <a:srgbClr val="FFFFFF"/>
-                          </a:solidFill>
-                          <a:latin typeface="Calibri" pitchFamily="34" charset="0"/>
-                          <a:ea typeface="Calibri" pitchFamily="34" charset="-122"/>
-                          <a:cs typeface="Calibri" pitchFamily="34" charset="-120"/>
-                        </a:rPr>
-                        <a:t>Duplicates</a:t>
-                      </a:r>
-                      <a:endParaRPr lang="en-US" sz="1200" dirty="0">
-                        <a:latin typeface="Calibri" charset="0"/>
-                        <a:ea typeface="Calibri" charset="0"/>
-                        <a:cs typeface="Calibri" charset="0"/>
-                      </a:endParaRPr>
-                    </a:p>
-                  </a:txBody>
-                  <a:tcPr marL="76200" marR="76200" marT="25400" marB="25400" anchor="ctr">
-                    <a:lnL w="9525" cap="flat" cmpd="sng" algn="ctr">
-                      <a:solidFill>
-                        <a:srgbClr val="D5DAE1"/>
-                      </a:solidFill>
-                      <a:prstDash val="solid"/>
-                      <a:round/>
-                      <a:headEnd type="none" w="med" len="med"/>
-                      <a:tailEnd type="none" w="med" len="med"/>
-                    </a:lnL>
-                    <a:lnR w="9525" cap="flat" cmpd="sng" algn="ctr">
-                      <a:solidFill>
-                        <a:srgbClr val="D5DAE1"/>
-                      </a:solidFill>
-                      <a:prstDash val="solid"/>
-                      <a:round/>
-                      <a:headEnd type="none" w="med" len="med"/>
-                      <a:tailEnd type="none" w="med" len="med"/>
-                    </a:lnR>
-                    <a:lnT w="9525" cap="flat" cmpd="sng" algn="ctr">
-                      <a:solidFill>
-                        <a:srgbClr val="D5DAE1"/>
-                      </a:solidFill>
-                      <a:prstDash val="solid"/>
-                      <a:round/>
-                      <a:headEnd type="none" w="med" len="med"/>
-                      <a:tailEnd type="none" w="med" len="med"/>
-                    </a:lnT>
-                    <a:lnB w="9525" cap="flat" cmpd="sng" algn="ctr">
-                      <a:solidFill>
-                        <a:srgbClr val="D5DAE1"/>
-                      </a:solidFill>
-                      <a:prstDash val="solid"/>
-                      <a:round/>
-                      <a:headEnd type="none" w="med" len="med"/>
-                      <a:tailEnd type="none" w="med" len="med"/>
-                    </a:lnB>
-                    <a:solidFill>
-                      <a:srgbClr val="14213D"/>
-                    </a:solidFill>
-                  </a:tcPr>
-                </a:tc>
-                <a:tc>
-                  <a:txBody>
-                    <a:bodyPr/>
-                    <a:lstStyle/>
-                    <a:p>
-                      <a:pPr indent="0" marL="0">
-                        <a:buNone/>
-                      </a:pPr>
-                      <a:r>
-                        <a:rPr lang="en-US" sz="1200" b="1" dirty="0">
-                          <a:solidFill>
-                            <a:srgbClr val="FFFFFF"/>
-                          </a:solidFill>
-                          <a:latin typeface="Calibri" pitchFamily="34" charset="0"/>
-                          <a:ea typeface="Calibri" pitchFamily="34" charset="-122"/>
-                          <a:cs typeface="Calibri" pitchFamily="34" charset="-120"/>
-                        </a:rPr>
-                        <a:t>SLA</a:t>
-                      </a:r>
-                      <a:endParaRPr lang="en-US" sz="1200" dirty="0">
-                        <a:latin typeface="Calibri" charset="0"/>
-                        <a:ea typeface="Calibri" charset="0"/>
-                        <a:cs typeface="Calibri" charset="0"/>
-                      </a:endParaRPr>
-                    </a:p>
-                  </a:txBody>
-                  <a:tcPr marL="76200" marR="76200" marT="25400" marB="25400" anchor="ctr">
-                    <a:lnL w="9525" cap="flat" cmpd="sng" algn="ctr">
-                      <a:solidFill>
-                        <a:srgbClr val="D5DAE1"/>
-                      </a:solidFill>
-                      <a:prstDash val="solid"/>
-                      <a:round/>
-                      <a:headEnd type="none" w="med" len="med"/>
-                      <a:tailEnd type="none" w="med" len="med"/>
-                    </a:lnL>
-                    <a:lnR w="9525" cap="flat" cmpd="sng" algn="ctr">
-                      <a:solidFill>
-                        <a:srgbClr val="D5DAE1"/>
-                      </a:solidFill>
-                      <a:prstDash val="solid"/>
-                      <a:round/>
-                      <a:headEnd type="none" w="med" len="med"/>
-                      <a:tailEnd type="none" w="med" len="med"/>
-                    </a:lnR>
-                    <a:lnT w="9525" cap="flat" cmpd="sng" algn="ctr">
-                      <a:solidFill>
-                        <a:srgbClr val="D5DAE1"/>
-                      </a:solidFill>
-                      <a:prstDash val="solid"/>
-                      <a:round/>
-                      <a:headEnd type="none" w="med" len="med"/>
-                      <a:tailEnd type="none" w="med" len="med"/>
-                    </a:lnT>
-                    <a:lnB w="9525" cap="flat" cmpd="sng" algn="ctr">
-                      <a:solidFill>
-                        <a:srgbClr val="D5DAE1"/>
-                      </a:solidFill>
-                      <a:prstDash val="solid"/>
-                      <a:round/>
-                      <a:headEnd type="none" w="med" len="med"/>
-                      <a:tailEnd type="none" w="med" len="med"/>
-                    </a:lnB>
-                    <a:solidFill>
-                      <a:srgbClr val="14213D"/>
-                    </a:solidFill>
-                  </a:tcPr>
-                </a:tc>
-              </a:tr>
-              <a:tr h="475488">
-                <a:tc>
-                  <a:txBody>
-                    <a:bodyPr/>
-                    <a:lstStyle/>
-                    <a:p>
-                      <a:pPr indent="0" marL="0">
-                        <a:buNone/>
-                      </a:pPr>
-                      <a:r>
-                        <a:rPr lang="en-US" sz="1200" dirty="0">
-                          <a:solidFill>
-                            <a:srgbClr val="26303F"/>
-                          </a:solidFill>
-                          <a:latin typeface="Calibri" pitchFamily="34" charset="0"/>
-                          <a:ea typeface="Calibri" pitchFamily="34" charset="-122"/>
-                          <a:cs typeface="Calibri" pitchFamily="34" charset="-120"/>
-                        </a:rPr>
-                        <a:t>osTicket</a:t>
-                      </a:r>
-                      <a:endParaRPr lang="en-US" sz="1200" dirty="0">
-                        <a:latin typeface="Calibri" charset="0"/>
-                        <a:ea typeface="Calibri" charset="0"/>
-                        <a:cs typeface="Calibri" charset="0"/>
-                      </a:endParaRPr>
-                    </a:p>
-                  </a:txBody>
-                  <a:tcPr marL="76200" marR="76200" marT="25400" marB="25400" anchor="ctr">
-                    <a:lnL w="9525" cap="flat" cmpd="sng" algn="ctr">
-                      <a:solidFill>
-                        <a:srgbClr val="D5DAE1"/>
-                      </a:solidFill>
-                      <a:prstDash val="solid"/>
-                      <a:round/>
-                      <a:headEnd type="none" w="med" len="med"/>
-                      <a:tailEnd type="none" w="med" len="med"/>
-                    </a:lnL>
-                    <a:lnR w="9525" cap="flat" cmpd="sng" algn="ctr">
-                      <a:solidFill>
-                        <a:srgbClr val="D5DAE1"/>
-                      </a:solidFill>
-                      <a:prstDash val="solid"/>
-                      <a:round/>
-                      <a:headEnd type="none" w="med" len="med"/>
-                      <a:tailEnd type="none" w="med" len="med"/>
-                    </a:lnR>
-                    <a:lnT w="9525" cap="flat" cmpd="sng" algn="ctr">
-                      <a:solidFill>
-                        <a:srgbClr val="D5DAE1"/>
-                      </a:solidFill>
-                      <a:prstDash val="solid"/>
-                      <a:round/>
-                      <a:headEnd type="none" w="med" len="med"/>
-                      <a:tailEnd type="none" w="med" len="med"/>
-                    </a:lnT>
-                    <a:lnB w="9525" cap="flat" cmpd="sng" algn="ctr">
-                      <a:solidFill>
-                        <a:srgbClr val="D5DAE1"/>
-                      </a:solidFill>
-                      <a:prstDash val="solid"/>
-                      <a:round/>
-                      <a:headEnd type="none" w="med" len="med"/>
-                      <a:tailEnd type="none" w="med" len="med"/>
-                    </a:lnB>
-                    <a:solidFill>
-                      <a:srgbClr val="FFFFFF"/>
-                    </a:solidFill>
-                  </a:tcPr>
-                </a:tc>
-                <a:tc>
-                  <a:txBody>
-                    <a:bodyPr/>
-                    <a:lstStyle/>
-                    <a:p>
-                      <a:pPr indent="0" marL="0">
-                        <a:buNone/>
-                      </a:pPr>
-                      <a:r>
-                        <a:rPr lang="en-US" sz="1200" dirty="0">
-                          <a:solidFill>
-                            <a:srgbClr val="26303F"/>
-                          </a:solidFill>
-                          <a:latin typeface="Calibri" pitchFamily="34" charset="0"/>
-                          <a:ea typeface="Calibri" pitchFamily="34" charset="-122"/>
-                          <a:cs typeface="Calibri" pitchFamily="34" charset="-120"/>
-                        </a:rPr>
-                        <a:t>manual per help topic</a:t>
-                      </a:r>
-                      <a:endParaRPr lang="en-US" sz="1200" dirty="0">
-                        <a:latin typeface="Calibri" charset="0"/>
-                        <a:ea typeface="Calibri" charset="0"/>
-                        <a:cs typeface="Calibri" charset="0"/>
-                      </a:endParaRPr>
-                    </a:p>
-                  </a:txBody>
-                  <a:tcPr marL="76200" marR="76200" marT="25400" marB="25400" anchor="ctr">
-                    <a:lnL w="9525" cap="flat" cmpd="sng" algn="ctr">
-                      <a:solidFill>
-                        <a:srgbClr val="D5DAE1"/>
-                      </a:solidFill>
-                      <a:prstDash val="solid"/>
-                      <a:round/>
-                      <a:headEnd type="none" w="med" len="med"/>
-                      <a:tailEnd type="none" w="med" len="med"/>
-                    </a:lnL>
-                    <a:lnR w="9525" cap="flat" cmpd="sng" algn="ctr">
-                      <a:solidFill>
-                        <a:srgbClr val="D5DAE1"/>
-                      </a:solidFill>
-                      <a:prstDash val="solid"/>
-                      <a:round/>
-                      <a:headEnd type="none" w="med" len="med"/>
-                      <a:tailEnd type="none" w="med" len="med"/>
-                    </a:lnR>
-                    <a:lnT w="9525" cap="flat" cmpd="sng" algn="ctr">
-                      <a:solidFill>
-                        <a:srgbClr val="D5DAE1"/>
-                      </a:solidFill>
-                      <a:prstDash val="solid"/>
-                      <a:round/>
-                      <a:headEnd type="none" w="med" len="med"/>
-                      <a:tailEnd type="none" w="med" len="med"/>
-                    </a:lnT>
-                    <a:lnB w="9525" cap="flat" cmpd="sng" algn="ctr">
-                      <a:solidFill>
-                        <a:srgbClr val="D5DAE1"/>
-                      </a:solidFill>
-                      <a:prstDash val="solid"/>
-                      <a:round/>
-                      <a:headEnd type="none" w="med" len="med"/>
-                      <a:tailEnd type="none" w="med" len="med"/>
-                    </a:lnB>
-                    <a:solidFill>
-                      <a:srgbClr val="FFFFFF"/>
-                    </a:solidFill>
-                  </a:tcPr>
-                </a:tc>
-                <a:tc>
-                  <a:txBody>
-                    <a:bodyPr/>
-                    <a:lstStyle/>
-                    <a:p>
-                      <a:pPr indent="0" marL="0">
-                        <a:buNone/>
-                      </a:pPr>
-                      <a:r>
-                        <a:rPr lang="en-US" sz="1200" dirty="0">
-                          <a:solidFill>
-                            <a:srgbClr val="26303F"/>
-                          </a:solidFill>
-                          <a:latin typeface="Calibri" pitchFamily="34" charset="0"/>
-                          <a:ea typeface="Calibri" pitchFamily="34" charset="-122"/>
-                          <a:cs typeface="Calibri" pitchFamily="34" charset="-120"/>
-                        </a:rPr>
-                        <a:t>by department, manual claim</a:t>
-                      </a:r>
-                      <a:endParaRPr lang="en-US" sz="1200" dirty="0">
-                        <a:latin typeface="Calibri" charset="0"/>
-                        <a:ea typeface="Calibri" charset="0"/>
-                        <a:cs typeface="Calibri" charset="0"/>
-                      </a:endParaRPr>
-                    </a:p>
-                  </a:txBody>
-                  <a:tcPr marL="76200" marR="76200" marT="25400" marB="25400" anchor="ctr">
-                    <a:lnL w="9525" cap="flat" cmpd="sng" algn="ctr">
-                      <a:solidFill>
-                        <a:srgbClr val="D5DAE1"/>
-                      </a:solidFill>
-                      <a:prstDash val="solid"/>
-                      <a:round/>
-                      <a:headEnd type="none" w="med" len="med"/>
-                      <a:tailEnd type="none" w="med" len="med"/>
-                    </a:lnL>
-                    <a:lnR w="9525" cap="flat" cmpd="sng" algn="ctr">
-                      <a:solidFill>
-                        <a:srgbClr val="D5DAE1"/>
-                      </a:solidFill>
-                      <a:prstDash val="solid"/>
-                      <a:round/>
-                      <a:headEnd type="none" w="med" len="med"/>
-                      <a:tailEnd type="none" w="med" len="med"/>
-                    </a:lnR>
-                    <a:lnT w="9525" cap="flat" cmpd="sng" algn="ctr">
-                      <a:solidFill>
-                        <a:srgbClr val="D5DAE1"/>
-                      </a:solidFill>
-                      <a:prstDash val="solid"/>
-                      <a:round/>
-                      <a:headEnd type="none" w="med" len="med"/>
-                      <a:tailEnd type="none" w="med" len="med"/>
-                    </a:lnT>
-                    <a:lnB w="9525" cap="flat" cmpd="sng" algn="ctr">
-                      <a:solidFill>
-                        <a:srgbClr val="D5DAE1"/>
-                      </a:solidFill>
-                      <a:prstDash val="solid"/>
-                      <a:round/>
-                      <a:headEnd type="none" w="med" len="med"/>
-                      <a:tailEnd type="none" w="med" len="med"/>
-                    </a:lnB>
-                    <a:solidFill>
-                      <a:srgbClr val="FFFFFF"/>
-                    </a:solidFill>
-                  </a:tcPr>
-                </a:tc>
-                <a:tc>
-                  <a:txBody>
-                    <a:bodyPr/>
-                    <a:lstStyle/>
-                    <a:p>
-                      <a:pPr indent="0" marL="0">
-                        <a:buNone/>
-                      </a:pPr>
-                      <a:r>
-                        <a:rPr lang="en-US" sz="1200" dirty="0">
-                          <a:solidFill>
-                            <a:srgbClr val="26303F"/>
-                          </a:solidFill>
-                          <a:latin typeface="Calibri" pitchFamily="34" charset="0"/>
-                          <a:ea typeface="Calibri" pitchFamily="34" charset="-122"/>
-                          <a:cs typeface="Calibri" pitchFamily="34" charset="-120"/>
-                        </a:rPr>
-                        <a:t>none</a:t>
-                      </a:r>
-                      <a:endParaRPr lang="en-US" sz="1200" dirty="0">
-                        <a:latin typeface="Calibri" charset="0"/>
-                        <a:ea typeface="Calibri" charset="0"/>
-                        <a:cs typeface="Calibri" charset="0"/>
-                      </a:endParaRPr>
-                    </a:p>
-                  </a:txBody>
-                  <a:tcPr marL="76200" marR="76200" marT="25400" marB="25400" anchor="ctr">
-                    <a:lnL w="9525" cap="flat" cmpd="sng" algn="ctr">
-                      <a:solidFill>
-                        <a:srgbClr val="D5DAE1"/>
-                      </a:solidFill>
-                      <a:prstDash val="solid"/>
-                      <a:round/>
-                      <a:headEnd type="none" w="med" len="med"/>
-                      <a:tailEnd type="none" w="med" len="med"/>
-                    </a:lnL>
-                    <a:lnR w="9525" cap="flat" cmpd="sng" algn="ctr">
-                      <a:solidFill>
-                        <a:srgbClr val="D5DAE1"/>
-                      </a:solidFill>
-                      <a:prstDash val="solid"/>
-                      <a:round/>
-                      <a:headEnd type="none" w="med" len="med"/>
-                      <a:tailEnd type="none" w="med" len="med"/>
-                    </a:lnR>
-                    <a:lnT w="9525" cap="flat" cmpd="sng" algn="ctr">
-                      <a:solidFill>
-                        <a:srgbClr val="D5DAE1"/>
-                      </a:solidFill>
-                      <a:prstDash val="solid"/>
-                      <a:round/>
-                      <a:headEnd type="none" w="med" len="med"/>
-                      <a:tailEnd type="none" w="med" len="med"/>
-                    </a:lnT>
-                    <a:lnB w="9525" cap="flat" cmpd="sng" algn="ctr">
-                      <a:solidFill>
-                        <a:srgbClr val="D5DAE1"/>
-                      </a:solidFill>
-                      <a:prstDash val="solid"/>
-                      <a:round/>
-                      <a:headEnd type="none" w="med" len="med"/>
-                      <a:tailEnd type="none" w="med" len="med"/>
-                    </a:lnB>
-                    <a:solidFill>
-                      <a:srgbClr val="FFFFFF"/>
-                    </a:solidFill>
-                  </a:tcPr>
-                </a:tc>
-                <a:tc>
-                  <a:txBody>
-                    <a:bodyPr/>
-                    <a:lstStyle/>
-                    <a:p>
-                      <a:pPr indent="0" marL="0">
-                        <a:buNone/>
-                      </a:pPr>
-                      <a:r>
-                        <a:rPr lang="en-US" sz="1200" dirty="0">
-                          <a:solidFill>
-                            <a:srgbClr val="26303F"/>
-                          </a:solidFill>
-                          <a:latin typeface="Calibri" pitchFamily="34" charset="0"/>
-                          <a:ea typeface="Calibri" pitchFamily="34" charset="-122"/>
-                          <a:cs typeface="Calibri" pitchFamily="34" charset="-120"/>
-                        </a:rPr>
-                        <a:t>overdue after a grace period</a:t>
-                      </a:r>
-                      <a:endParaRPr lang="en-US" sz="1200" dirty="0">
-                        <a:latin typeface="Calibri" charset="0"/>
-                        <a:ea typeface="Calibri" charset="0"/>
-                        <a:cs typeface="Calibri" charset="0"/>
-                      </a:endParaRPr>
-                    </a:p>
-                  </a:txBody>
-                  <a:tcPr marL="76200" marR="76200" marT="25400" marB="25400" anchor="ctr">
-                    <a:lnL w="9525" cap="flat" cmpd="sng" algn="ctr">
-                      <a:solidFill>
-                        <a:srgbClr val="D5DAE1"/>
-                      </a:solidFill>
-                      <a:prstDash val="solid"/>
-                      <a:round/>
-                      <a:headEnd type="none" w="med" len="med"/>
-                      <a:tailEnd type="none" w="med" len="med"/>
-                    </a:lnL>
-                    <a:lnR w="9525" cap="flat" cmpd="sng" algn="ctr">
-                      <a:solidFill>
-                        <a:srgbClr val="D5DAE1"/>
-                      </a:solidFill>
-                      <a:prstDash val="solid"/>
-                      <a:round/>
-                      <a:headEnd type="none" w="med" len="med"/>
-                      <a:tailEnd type="none" w="med" len="med"/>
-                    </a:lnR>
-                    <a:lnT w="9525" cap="flat" cmpd="sng" algn="ctr">
-                      <a:solidFill>
-                        <a:srgbClr val="D5DAE1"/>
-                      </a:solidFill>
-                      <a:prstDash val="solid"/>
-                      <a:round/>
-                      <a:headEnd type="none" w="med" len="med"/>
-                      <a:tailEnd type="none" w="med" len="med"/>
-                    </a:lnT>
-                    <a:lnB w="9525" cap="flat" cmpd="sng" algn="ctr">
-                      <a:solidFill>
-                        <a:srgbClr val="D5DAE1"/>
-                      </a:solidFill>
-                      <a:prstDash val="solid"/>
-                      <a:round/>
-                      <a:headEnd type="none" w="med" len="med"/>
-                      <a:tailEnd type="none" w="med" len="med"/>
-                    </a:lnB>
-                    <a:solidFill>
-                      <a:srgbClr val="FFFFFF"/>
-                    </a:solidFill>
-                  </a:tcPr>
-                </a:tc>
-              </a:tr>
-              <a:tr h="475488">
-                <a:tc>
-                  <a:txBody>
-                    <a:bodyPr/>
-                    <a:lstStyle/>
-                    <a:p>
-                      <a:pPr indent="0" marL="0">
-                        <a:buNone/>
-                      </a:pPr>
-                      <a:r>
-                        <a:rPr lang="en-US" sz="1200" dirty="0">
-                          <a:solidFill>
-                            <a:srgbClr val="26303F"/>
-                          </a:solidFill>
-                          <a:latin typeface="Calibri" pitchFamily="34" charset="0"/>
-                          <a:ea typeface="Calibri" pitchFamily="34" charset="-122"/>
-                          <a:cs typeface="Calibri" pitchFamily="34" charset="-120"/>
-                        </a:rPr>
-                        <a:t>Zammad</a:t>
-                      </a:r>
-                      <a:endParaRPr lang="en-US" sz="1200" dirty="0">
-                        <a:latin typeface="Calibri" charset="0"/>
-                        <a:ea typeface="Calibri" charset="0"/>
-                        <a:cs typeface="Calibri" charset="0"/>
-                      </a:endParaRPr>
-                    </a:p>
-                  </a:txBody>
-                  <a:tcPr marL="76200" marR="76200" marT="25400" marB="25400" anchor="ctr">
-                    <a:lnL w="9525" cap="flat" cmpd="sng" algn="ctr">
-                      <a:solidFill>
-                        <a:srgbClr val="D5DAE1"/>
-                      </a:solidFill>
-                      <a:prstDash val="solid"/>
-                      <a:round/>
-                      <a:headEnd type="none" w="med" len="med"/>
-                      <a:tailEnd type="none" w="med" len="med"/>
-                    </a:lnL>
-                    <a:lnR w="9525" cap="flat" cmpd="sng" algn="ctr">
-                      <a:solidFill>
-                        <a:srgbClr val="D5DAE1"/>
-                      </a:solidFill>
-                      <a:prstDash val="solid"/>
-                      <a:round/>
-                      <a:headEnd type="none" w="med" len="med"/>
-                      <a:tailEnd type="none" w="med" len="med"/>
-                    </a:lnR>
-                    <a:lnT w="9525" cap="flat" cmpd="sng" algn="ctr">
-                      <a:solidFill>
-                        <a:srgbClr val="D5DAE1"/>
-                      </a:solidFill>
-                      <a:prstDash val="solid"/>
-                      <a:round/>
-                      <a:headEnd type="none" w="med" len="med"/>
-                      <a:tailEnd type="none" w="med" len="med"/>
-                    </a:lnT>
-                    <a:lnB w="9525" cap="flat" cmpd="sng" algn="ctr">
-                      <a:solidFill>
-                        <a:srgbClr val="D5DAE1"/>
-                      </a:solidFill>
-                      <a:prstDash val="solid"/>
-                      <a:round/>
-                      <a:headEnd type="none" w="med" len="med"/>
-                      <a:tailEnd type="none" w="med" len="med"/>
-                    </a:lnB>
-                    <a:solidFill>
-                      <a:srgbClr val="F7F8FA"/>
-                    </a:solidFill>
-                  </a:tcPr>
-                </a:tc>
-                <a:tc>
-                  <a:txBody>
-                    <a:bodyPr/>
-                    <a:lstStyle/>
-                    <a:p>
-                      <a:pPr indent="0" marL="0">
-                        <a:buNone/>
-                      </a:pPr>
-                      <a:r>
-                        <a:rPr lang="en-US" sz="1200" dirty="0">
-                          <a:solidFill>
-                            <a:srgbClr val="26303F"/>
-                          </a:solidFill>
-                          <a:latin typeface="Calibri" pitchFamily="34" charset="0"/>
-                          <a:ea typeface="Calibri" pitchFamily="34" charset="-122"/>
-                          <a:cs typeface="Calibri" pitchFamily="34" charset="-120"/>
-                        </a:rPr>
-                        <a:t>three fixed levels</a:t>
-                      </a:r>
-                      <a:endParaRPr lang="en-US" sz="1200" dirty="0">
-                        <a:latin typeface="Calibri" charset="0"/>
-                        <a:ea typeface="Calibri" charset="0"/>
-                        <a:cs typeface="Calibri" charset="0"/>
-                      </a:endParaRPr>
-                    </a:p>
-                  </a:txBody>
-                  <a:tcPr marL="76200" marR="76200" marT="25400" marB="25400" anchor="ctr">
-                    <a:lnL w="9525" cap="flat" cmpd="sng" algn="ctr">
-                      <a:solidFill>
-                        <a:srgbClr val="D5DAE1"/>
-                      </a:solidFill>
-                      <a:prstDash val="solid"/>
-                      <a:round/>
-                      <a:headEnd type="none" w="med" len="med"/>
-                      <a:tailEnd type="none" w="med" len="med"/>
-                    </a:lnL>
-                    <a:lnR w="9525" cap="flat" cmpd="sng" algn="ctr">
-                      <a:solidFill>
-                        <a:srgbClr val="D5DAE1"/>
-                      </a:solidFill>
-                      <a:prstDash val="solid"/>
-                      <a:round/>
-                      <a:headEnd type="none" w="med" len="med"/>
-                      <a:tailEnd type="none" w="med" len="med"/>
-                    </a:lnR>
-                    <a:lnT w="9525" cap="flat" cmpd="sng" algn="ctr">
-                      <a:solidFill>
-                        <a:srgbClr val="D5DAE1"/>
-                      </a:solidFill>
-                      <a:prstDash val="solid"/>
-                      <a:round/>
-                      <a:headEnd type="none" w="med" len="med"/>
-                      <a:tailEnd type="none" w="med" len="med"/>
-                    </a:lnT>
-                    <a:lnB w="9525" cap="flat" cmpd="sng" algn="ctr">
-                      <a:solidFill>
-                        <a:srgbClr val="D5DAE1"/>
-                      </a:solidFill>
-                      <a:prstDash val="solid"/>
-                      <a:round/>
-                      <a:headEnd type="none" w="med" len="med"/>
-                      <a:tailEnd type="none" w="med" len="med"/>
-                    </a:lnB>
-                    <a:solidFill>
-                      <a:srgbClr val="F7F8FA"/>
-                    </a:solidFill>
-                  </a:tcPr>
-                </a:tc>
-                <a:tc>
-                  <a:txBody>
-                    <a:bodyPr/>
-                    <a:lstStyle/>
-                    <a:p>
-                      <a:pPr indent="0" marL="0">
-                        <a:buNone/>
-                      </a:pPr>
-                      <a:r>
-                        <a:rPr lang="en-US" sz="1200" dirty="0">
-                          <a:solidFill>
-                            <a:srgbClr val="26303F"/>
-                          </a:solidFill>
-                          <a:latin typeface="Calibri" pitchFamily="34" charset="0"/>
-                          <a:ea typeface="Calibri" pitchFamily="34" charset="-122"/>
-                          <a:cs typeface="Calibri" pitchFamily="34" charset="-120"/>
-                        </a:rPr>
-                        <a:t>group rules, no workload</a:t>
-                      </a:r>
-                      <a:endParaRPr lang="en-US" sz="1200" dirty="0">
-                        <a:latin typeface="Calibri" charset="0"/>
-                        <a:ea typeface="Calibri" charset="0"/>
-                        <a:cs typeface="Calibri" charset="0"/>
-                      </a:endParaRPr>
-                    </a:p>
-                  </a:txBody>
-                  <a:tcPr marL="76200" marR="76200" marT="25400" marB="25400" anchor="ctr">
-                    <a:lnL w="9525" cap="flat" cmpd="sng" algn="ctr">
-                      <a:solidFill>
-                        <a:srgbClr val="D5DAE1"/>
-                      </a:solidFill>
-                      <a:prstDash val="solid"/>
-                      <a:round/>
-                      <a:headEnd type="none" w="med" len="med"/>
-                      <a:tailEnd type="none" w="med" len="med"/>
-                    </a:lnL>
-                    <a:lnR w="9525" cap="flat" cmpd="sng" algn="ctr">
-                      <a:solidFill>
-                        <a:srgbClr val="D5DAE1"/>
-                      </a:solidFill>
-                      <a:prstDash val="solid"/>
-                      <a:round/>
-                      <a:headEnd type="none" w="med" len="med"/>
-                      <a:tailEnd type="none" w="med" len="med"/>
-                    </a:lnR>
-                    <a:lnT w="9525" cap="flat" cmpd="sng" algn="ctr">
-                      <a:solidFill>
-                        <a:srgbClr val="D5DAE1"/>
-                      </a:solidFill>
-                      <a:prstDash val="solid"/>
-                      <a:round/>
-                      <a:headEnd type="none" w="med" len="med"/>
-                      <a:tailEnd type="none" w="med" len="med"/>
-                    </a:lnT>
-                    <a:lnB w="9525" cap="flat" cmpd="sng" algn="ctr">
-                      <a:solidFill>
-                        <a:srgbClr val="D5DAE1"/>
-                      </a:solidFill>
-                      <a:prstDash val="solid"/>
-                      <a:round/>
-                      <a:headEnd type="none" w="med" len="med"/>
-                      <a:tailEnd type="none" w="med" len="med"/>
-                    </a:lnB>
-                    <a:solidFill>
-                      <a:srgbClr val="F7F8FA"/>
-                    </a:solidFill>
-                  </a:tcPr>
-                </a:tc>
-                <a:tc>
-                  <a:txBody>
-                    <a:bodyPr/>
-                    <a:lstStyle/>
-                    <a:p>
-                      <a:pPr indent="0" marL="0">
-                        <a:buNone/>
-                      </a:pPr>
-                      <a:r>
-                        <a:rPr lang="en-US" sz="1200" dirty="0">
-                          <a:solidFill>
-                            <a:srgbClr val="26303F"/>
-                          </a:solidFill>
-                          <a:latin typeface="Calibri" pitchFamily="34" charset="0"/>
-                          <a:ea typeface="Calibri" pitchFamily="34" charset="-122"/>
-                          <a:cs typeface="Calibri" pitchFamily="34" charset="-120"/>
-                        </a:rPr>
-                        <a:t>manual merge</a:t>
-                      </a:r>
-                      <a:endParaRPr lang="en-US" sz="1200" dirty="0">
-                        <a:latin typeface="Calibri" charset="0"/>
-                        <a:ea typeface="Calibri" charset="0"/>
-                        <a:cs typeface="Calibri" charset="0"/>
-                      </a:endParaRPr>
-                    </a:p>
-                  </a:txBody>
-                  <a:tcPr marL="76200" marR="76200" marT="25400" marB="25400" anchor="ctr">
-                    <a:lnL w="9525" cap="flat" cmpd="sng" algn="ctr">
-                      <a:solidFill>
-                        <a:srgbClr val="D5DAE1"/>
-                      </a:solidFill>
-                      <a:prstDash val="solid"/>
-                      <a:round/>
-                      <a:headEnd type="none" w="med" len="med"/>
-                      <a:tailEnd type="none" w="med" len="med"/>
-                    </a:lnL>
-                    <a:lnR w="9525" cap="flat" cmpd="sng" algn="ctr">
-                      <a:solidFill>
-                        <a:srgbClr val="D5DAE1"/>
-                      </a:solidFill>
-                      <a:prstDash val="solid"/>
-                      <a:round/>
-                      <a:headEnd type="none" w="med" len="med"/>
-                      <a:tailEnd type="none" w="med" len="med"/>
-                    </a:lnR>
-                    <a:lnT w="9525" cap="flat" cmpd="sng" algn="ctr">
-                      <a:solidFill>
-                        <a:srgbClr val="D5DAE1"/>
-                      </a:solidFill>
-                      <a:prstDash val="solid"/>
-                      <a:round/>
-                      <a:headEnd type="none" w="med" len="med"/>
-                      <a:tailEnd type="none" w="med" len="med"/>
-                    </a:lnT>
-                    <a:lnB w="9525" cap="flat" cmpd="sng" algn="ctr">
-                      <a:solidFill>
-                        <a:srgbClr val="D5DAE1"/>
-                      </a:solidFill>
-                      <a:prstDash val="solid"/>
-                      <a:round/>
-                      <a:headEnd type="none" w="med" len="med"/>
-                      <a:tailEnd type="none" w="med" len="med"/>
-                    </a:lnB>
-                    <a:solidFill>
-                      <a:srgbClr val="F7F8FA"/>
-                    </a:solidFill>
-                  </a:tcPr>
-                </a:tc>
-                <a:tc>
-                  <a:txBody>
-                    <a:bodyPr/>
-                    <a:lstStyle/>
-                    <a:p>
-                      <a:pPr indent="0" marL="0">
-                        <a:buNone/>
-                      </a:pPr>
-                      <a:r>
-                        <a:rPr lang="en-US" sz="1200" dirty="0">
-                          <a:solidFill>
-                            <a:srgbClr val="26303F"/>
-                          </a:solidFill>
-                          <a:latin typeface="Calibri" pitchFamily="34" charset="0"/>
-                          <a:ea typeface="Calibri" pitchFamily="34" charset="-122"/>
-                          <a:cs typeface="Calibri" pitchFamily="34" charset="-120"/>
-                        </a:rPr>
-                        <a:t>timers with calendars</a:t>
-                      </a:r>
-                      <a:endParaRPr lang="en-US" sz="1200" dirty="0">
-                        <a:latin typeface="Calibri" charset="0"/>
-                        <a:ea typeface="Calibri" charset="0"/>
-                        <a:cs typeface="Calibri" charset="0"/>
-                      </a:endParaRPr>
-                    </a:p>
-                  </a:txBody>
-                  <a:tcPr marL="76200" marR="76200" marT="25400" marB="25400" anchor="ctr">
-                    <a:lnL w="9525" cap="flat" cmpd="sng" algn="ctr">
-                      <a:solidFill>
-                        <a:srgbClr val="D5DAE1"/>
-                      </a:solidFill>
-                      <a:prstDash val="solid"/>
-                      <a:round/>
-                      <a:headEnd type="none" w="med" len="med"/>
-                      <a:tailEnd type="none" w="med" len="med"/>
-                    </a:lnL>
-                    <a:lnR w="9525" cap="flat" cmpd="sng" algn="ctr">
-                      <a:solidFill>
-                        <a:srgbClr val="D5DAE1"/>
-                      </a:solidFill>
-                      <a:prstDash val="solid"/>
-                      <a:round/>
-                      <a:headEnd type="none" w="med" len="med"/>
-                      <a:tailEnd type="none" w="med" len="med"/>
-                    </a:lnR>
-                    <a:lnT w="9525" cap="flat" cmpd="sng" algn="ctr">
-                      <a:solidFill>
-                        <a:srgbClr val="D5DAE1"/>
-                      </a:solidFill>
-                      <a:prstDash val="solid"/>
-                      <a:round/>
-                      <a:headEnd type="none" w="med" len="med"/>
-                      <a:tailEnd type="none" w="med" len="med"/>
-                    </a:lnT>
-                    <a:lnB w="9525" cap="flat" cmpd="sng" algn="ctr">
-                      <a:solidFill>
-                        <a:srgbClr val="D5DAE1"/>
-                      </a:solidFill>
-                      <a:prstDash val="solid"/>
-                      <a:round/>
-                      <a:headEnd type="none" w="med" len="med"/>
-                      <a:tailEnd type="none" w="med" len="med"/>
-                    </a:lnB>
-                    <a:solidFill>
-                      <a:srgbClr val="F7F8FA"/>
-                    </a:solidFill>
-                  </a:tcPr>
-                </a:tc>
-              </a:tr>
-              <a:tr h="475488">
-                <a:tc>
-                  <a:txBody>
-                    <a:bodyPr/>
-                    <a:lstStyle/>
-                    <a:p>
-                      <a:pPr indent="0" marL="0">
-                        <a:buNone/>
-                      </a:pPr>
-                      <a:r>
-                        <a:rPr lang="en-US" sz="1200" dirty="0">
-                          <a:solidFill>
-                            <a:srgbClr val="26303F"/>
-                          </a:solidFill>
-                          <a:latin typeface="Calibri" pitchFamily="34" charset="0"/>
-                          <a:ea typeface="Calibri" pitchFamily="34" charset="-122"/>
-                          <a:cs typeface="Calibri" pitchFamily="34" charset="-120"/>
-                        </a:rPr>
-                        <a:t>GLPI</a:t>
-                      </a:r>
-                      <a:endParaRPr lang="en-US" sz="1200" dirty="0">
-                        <a:latin typeface="Calibri" charset="0"/>
-                        <a:ea typeface="Calibri" charset="0"/>
-                        <a:cs typeface="Calibri" charset="0"/>
-                      </a:endParaRPr>
-                    </a:p>
-                  </a:txBody>
-                  <a:tcPr marL="76200" marR="76200" marT="25400" marB="25400" anchor="ctr">
-                    <a:lnL w="9525" cap="flat" cmpd="sng" algn="ctr">
-                      <a:solidFill>
-                        <a:srgbClr val="D5DAE1"/>
-                      </a:solidFill>
-                      <a:prstDash val="solid"/>
-                      <a:round/>
-                      <a:headEnd type="none" w="med" len="med"/>
-                      <a:tailEnd type="none" w="med" len="med"/>
-                    </a:lnL>
-                    <a:lnR w="9525" cap="flat" cmpd="sng" algn="ctr">
-                      <a:solidFill>
-                        <a:srgbClr val="D5DAE1"/>
-                      </a:solidFill>
-                      <a:prstDash val="solid"/>
-                      <a:round/>
-                      <a:headEnd type="none" w="med" len="med"/>
-                      <a:tailEnd type="none" w="med" len="med"/>
-                    </a:lnR>
-                    <a:lnT w="9525" cap="flat" cmpd="sng" algn="ctr">
-                      <a:solidFill>
-                        <a:srgbClr val="D5DAE1"/>
-                      </a:solidFill>
-                      <a:prstDash val="solid"/>
-                      <a:round/>
-                      <a:headEnd type="none" w="med" len="med"/>
-                      <a:tailEnd type="none" w="med" len="med"/>
-                    </a:lnT>
-                    <a:lnB w="9525" cap="flat" cmpd="sng" algn="ctr">
-                      <a:solidFill>
-                        <a:srgbClr val="D5DAE1"/>
-                      </a:solidFill>
-                      <a:prstDash val="solid"/>
-                      <a:round/>
-                      <a:headEnd type="none" w="med" len="med"/>
-                      <a:tailEnd type="none" w="med" len="med"/>
-                    </a:lnB>
-                    <a:solidFill>
-                      <a:srgbClr val="FFFFFF"/>
-                    </a:solidFill>
-                  </a:tcPr>
-                </a:tc>
-                <a:tc>
-                  <a:txBody>
-                    <a:bodyPr/>
-                    <a:lstStyle/>
-                    <a:p>
-                      <a:pPr indent="0" marL="0">
-                        <a:buNone/>
-                      </a:pPr>
-                      <a:r>
-                        <a:rPr lang="en-US" sz="1200" dirty="0">
-                          <a:solidFill>
-                            <a:srgbClr val="26303F"/>
-                          </a:solidFill>
-                          <a:latin typeface="Calibri" pitchFamily="34" charset="0"/>
-                          <a:ea typeface="Calibri" pitchFamily="34" charset="-122"/>
-                          <a:cs typeface="Calibri" pitchFamily="34" charset="-120"/>
-                        </a:rPr>
-                        <a:t>urgency × impact matrix</a:t>
-                      </a:r>
-                      <a:endParaRPr lang="en-US" sz="1200" dirty="0">
-                        <a:latin typeface="Calibri" charset="0"/>
-                        <a:ea typeface="Calibri" charset="0"/>
-                        <a:cs typeface="Calibri" charset="0"/>
-                      </a:endParaRPr>
-                    </a:p>
-                  </a:txBody>
-                  <a:tcPr marL="76200" marR="76200" marT="25400" marB="25400" anchor="ctr">
-                    <a:lnL w="9525" cap="flat" cmpd="sng" algn="ctr">
-                      <a:solidFill>
-                        <a:srgbClr val="D5DAE1"/>
-                      </a:solidFill>
-                      <a:prstDash val="solid"/>
-                      <a:round/>
-                      <a:headEnd type="none" w="med" len="med"/>
-                      <a:tailEnd type="none" w="med" len="med"/>
-                    </a:lnL>
-                    <a:lnR w="9525" cap="flat" cmpd="sng" algn="ctr">
-                      <a:solidFill>
-                        <a:srgbClr val="D5DAE1"/>
-                      </a:solidFill>
-                      <a:prstDash val="solid"/>
-                      <a:round/>
-                      <a:headEnd type="none" w="med" len="med"/>
-                      <a:tailEnd type="none" w="med" len="med"/>
-                    </a:lnR>
-                    <a:lnT w="9525" cap="flat" cmpd="sng" algn="ctr">
-                      <a:solidFill>
-                        <a:srgbClr val="D5DAE1"/>
-                      </a:solidFill>
-                      <a:prstDash val="solid"/>
-                      <a:round/>
-                      <a:headEnd type="none" w="med" len="med"/>
-                      <a:tailEnd type="none" w="med" len="med"/>
-                    </a:lnT>
-                    <a:lnB w="9525" cap="flat" cmpd="sng" algn="ctr">
-                      <a:solidFill>
-                        <a:srgbClr val="D5DAE1"/>
-                      </a:solidFill>
-                      <a:prstDash val="solid"/>
-                      <a:round/>
-                      <a:headEnd type="none" w="med" len="med"/>
-                      <a:tailEnd type="none" w="med" len="med"/>
-                    </a:lnB>
-                    <a:solidFill>
-                      <a:srgbClr val="FFFFFF"/>
-                    </a:solidFill>
-                  </a:tcPr>
-                </a:tc>
-                <a:tc>
-                  <a:txBody>
-                    <a:bodyPr/>
-                    <a:lstStyle/>
-                    <a:p>
-                      <a:pPr indent="0" marL="0">
-                        <a:buNone/>
-                      </a:pPr>
-                      <a:r>
-                        <a:rPr lang="en-US" sz="1200" dirty="0">
-                          <a:solidFill>
-                            <a:srgbClr val="26303F"/>
-                          </a:solidFill>
-                          <a:latin typeface="Calibri" pitchFamily="34" charset="0"/>
-                          <a:ea typeface="Calibri" pitchFamily="34" charset="-122"/>
-                          <a:cs typeface="Calibri" pitchFamily="34" charset="-120"/>
-                        </a:rPr>
-                        <a:t>rules pick a technician</a:t>
-                      </a:r>
-                      <a:endParaRPr lang="en-US" sz="1200" dirty="0">
-                        <a:latin typeface="Calibri" charset="0"/>
-                        <a:ea typeface="Calibri" charset="0"/>
-                        <a:cs typeface="Calibri" charset="0"/>
-                      </a:endParaRPr>
-                    </a:p>
-                  </a:txBody>
-                  <a:tcPr marL="76200" marR="76200" marT="25400" marB="25400" anchor="ctr">
-                    <a:lnL w="9525" cap="flat" cmpd="sng" algn="ctr">
-                      <a:solidFill>
-                        <a:srgbClr val="D5DAE1"/>
-                      </a:solidFill>
-                      <a:prstDash val="solid"/>
-                      <a:round/>
-                      <a:headEnd type="none" w="med" len="med"/>
-                      <a:tailEnd type="none" w="med" len="med"/>
-                    </a:lnL>
-                    <a:lnR w="9525" cap="flat" cmpd="sng" algn="ctr">
-                      <a:solidFill>
-                        <a:srgbClr val="D5DAE1"/>
-                      </a:solidFill>
-                      <a:prstDash val="solid"/>
-                      <a:round/>
-                      <a:headEnd type="none" w="med" len="med"/>
-                      <a:tailEnd type="none" w="med" len="med"/>
-                    </a:lnR>
-                    <a:lnT w="9525" cap="flat" cmpd="sng" algn="ctr">
-                      <a:solidFill>
-                        <a:srgbClr val="D5DAE1"/>
-                      </a:solidFill>
-                      <a:prstDash val="solid"/>
-                      <a:round/>
-                      <a:headEnd type="none" w="med" len="med"/>
-                      <a:tailEnd type="none" w="med" len="med"/>
-                    </a:lnT>
-                    <a:lnB w="9525" cap="flat" cmpd="sng" algn="ctr">
-                      <a:solidFill>
-                        <a:srgbClr val="D5DAE1"/>
-                      </a:solidFill>
-                      <a:prstDash val="solid"/>
-                      <a:round/>
-                      <a:headEnd type="none" w="med" len="med"/>
-                      <a:tailEnd type="none" w="med" len="med"/>
-                    </a:lnB>
-                    <a:solidFill>
-                      <a:srgbClr val="FFFFFF"/>
-                    </a:solidFill>
-                  </a:tcPr>
-                </a:tc>
-                <a:tc>
-                  <a:txBody>
-                    <a:bodyPr/>
-                    <a:lstStyle/>
-                    <a:p>
-                      <a:pPr indent="0" marL="0">
-                        <a:buNone/>
-                      </a:pPr>
-                      <a:r>
-                        <a:rPr lang="en-US" sz="1200" dirty="0">
-                          <a:solidFill>
-                            <a:srgbClr val="26303F"/>
-                          </a:solidFill>
-                          <a:latin typeface="Calibri" pitchFamily="34" charset="0"/>
-                          <a:ea typeface="Calibri" pitchFamily="34" charset="-122"/>
-                          <a:cs typeface="Calibri" pitchFamily="34" charset="-120"/>
-                        </a:rPr>
-                        <a:t>none</a:t>
-                      </a:r>
-                      <a:endParaRPr lang="en-US" sz="1200" dirty="0">
-                        <a:latin typeface="Calibri" charset="0"/>
-                        <a:ea typeface="Calibri" charset="0"/>
-                        <a:cs typeface="Calibri" charset="0"/>
-                      </a:endParaRPr>
-                    </a:p>
-                  </a:txBody>
-                  <a:tcPr marL="76200" marR="76200" marT="25400" marB="25400" anchor="ctr">
-                    <a:lnL w="9525" cap="flat" cmpd="sng" algn="ctr">
-                      <a:solidFill>
-                        <a:srgbClr val="D5DAE1"/>
-                      </a:solidFill>
-                      <a:prstDash val="solid"/>
-                      <a:round/>
-                      <a:headEnd type="none" w="med" len="med"/>
-                      <a:tailEnd type="none" w="med" len="med"/>
-                    </a:lnL>
-                    <a:lnR w="9525" cap="flat" cmpd="sng" algn="ctr">
-                      <a:solidFill>
-                        <a:srgbClr val="D5DAE1"/>
-                      </a:solidFill>
-                      <a:prstDash val="solid"/>
-                      <a:round/>
-                      <a:headEnd type="none" w="med" len="med"/>
-                      <a:tailEnd type="none" w="med" len="med"/>
-                    </a:lnR>
-                    <a:lnT w="9525" cap="flat" cmpd="sng" algn="ctr">
-                      <a:solidFill>
-                        <a:srgbClr val="D5DAE1"/>
-                      </a:solidFill>
-                      <a:prstDash val="solid"/>
-                      <a:round/>
-                      <a:headEnd type="none" w="med" len="med"/>
-                      <a:tailEnd type="none" w="med" len="med"/>
-                    </a:lnT>
-                    <a:lnB w="9525" cap="flat" cmpd="sng" algn="ctr">
-                      <a:solidFill>
-                        <a:srgbClr val="D5DAE1"/>
-                      </a:solidFill>
-                      <a:prstDash val="solid"/>
-                      <a:round/>
-                      <a:headEnd type="none" w="med" len="med"/>
-                      <a:tailEnd type="none" w="med" len="med"/>
-                    </a:lnB>
-                    <a:solidFill>
-                      <a:srgbClr val="FFFFFF"/>
-                    </a:solidFill>
-                  </a:tcPr>
-                </a:tc>
-                <a:tc>
-                  <a:txBody>
-                    <a:bodyPr/>
-                    <a:lstStyle/>
-                    <a:p>
-                      <a:pPr indent="0" marL="0">
-                        <a:buNone/>
-                      </a:pPr>
-                      <a:r>
-                        <a:rPr lang="en-US" sz="1200" dirty="0">
-                          <a:solidFill>
-                            <a:srgbClr val="26303F"/>
-                          </a:solidFill>
-                          <a:latin typeface="Calibri" pitchFamily="34" charset="0"/>
-                          <a:ea typeface="Calibri" pitchFamily="34" charset="-122"/>
-                          <a:cs typeface="Calibri" pitchFamily="34" charset="-120"/>
-                        </a:rPr>
-                        <a:t>attached by rules</a:t>
-                      </a:r>
-                      <a:endParaRPr lang="en-US" sz="1200" dirty="0">
-                        <a:latin typeface="Calibri" charset="0"/>
-                        <a:ea typeface="Calibri" charset="0"/>
-                        <a:cs typeface="Calibri" charset="0"/>
-                      </a:endParaRPr>
-                    </a:p>
-                  </a:txBody>
-                  <a:tcPr marL="76200" marR="76200" marT="25400" marB="25400" anchor="ctr">
-                    <a:lnL w="9525" cap="flat" cmpd="sng" algn="ctr">
-                      <a:solidFill>
-                        <a:srgbClr val="D5DAE1"/>
-                      </a:solidFill>
-                      <a:prstDash val="solid"/>
-                      <a:round/>
-                      <a:headEnd type="none" w="med" len="med"/>
-                      <a:tailEnd type="none" w="med" len="med"/>
-                    </a:lnL>
-                    <a:lnR w="9525" cap="flat" cmpd="sng" algn="ctr">
-                      <a:solidFill>
-                        <a:srgbClr val="D5DAE1"/>
-                      </a:solidFill>
-                      <a:prstDash val="solid"/>
-                      <a:round/>
-                      <a:headEnd type="none" w="med" len="med"/>
-                      <a:tailEnd type="none" w="med" len="med"/>
-                    </a:lnR>
-                    <a:lnT w="9525" cap="flat" cmpd="sng" algn="ctr">
-                      <a:solidFill>
-                        <a:srgbClr val="D5DAE1"/>
-                      </a:solidFill>
-                      <a:prstDash val="solid"/>
-                      <a:round/>
-                      <a:headEnd type="none" w="med" len="med"/>
-                      <a:tailEnd type="none" w="med" len="med"/>
-                    </a:lnT>
-                    <a:lnB w="9525" cap="flat" cmpd="sng" algn="ctr">
-                      <a:solidFill>
-                        <a:srgbClr val="D5DAE1"/>
-                      </a:solidFill>
-                      <a:prstDash val="solid"/>
-                      <a:round/>
-                      <a:headEnd type="none" w="med" len="med"/>
-                      <a:tailEnd type="none" w="med" len="med"/>
-                    </a:lnB>
-                    <a:solidFill>
-                      <a:srgbClr val="FFFFFF"/>
-                    </a:solidFill>
-                  </a:tcPr>
-                </a:tc>
-              </a:tr>
-              <a:tr h="475488">
-                <a:tc>
-                  <a:txBody>
-                    <a:bodyPr/>
-                    <a:lstStyle/>
-                    <a:p>
-                      <a:pPr indent="0" marL="0">
-                        <a:buNone/>
-                      </a:pPr>
-                      <a:r>
-                        <a:rPr lang="en-US" sz="1200" dirty="0">
-                          <a:solidFill>
-                            <a:srgbClr val="26303F"/>
-                          </a:solidFill>
-                          <a:latin typeface="Calibri" pitchFamily="34" charset="0"/>
-                          <a:ea typeface="Calibri" pitchFamily="34" charset="-122"/>
-                          <a:cs typeface="Calibri" pitchFamily="34" charset="-120"/>
-                        </a:rPr>
-                        <a:t>FreeScout</a:t>
-                      </a:r>
-                      <a:endParaRPr lang="en-US" sz="1200" dirty="0">
-                        <a:latin typeface="Calibri" charset="0"/>
-                        <a:ea typeface="Calibri" charset="0"/>
-                        <a:cs typeface="Calibri" charset="0"/>
-                      </a:endParaRPr>
-                    </a:p>
-                  </a:txBody>
-                  <a:tcPr marL="76200" marR="76200" marT="25400" marB="25400" anchor="ctr">
-                    <a:lnL w="9525" cap="flat" cmpd="sng" algn="ctr">
-                      <a:solidFill>
-                        <a:srgbClr val="D5DAE1"/>
-                      </a:solidFill>
-                      <a:prstDash val="solid"/>
-                      <a:round/>
-                      <a:headEnd type="none" w="med" len="med"/>
-                      <a:tailEnd type="none" w="med" len="med"/>
-                    </a:lnL>
-                    <a:lnR w="9525" cap="flat" cmpd="sng" algn="ctr">
-                      <a:solidFill>
-                        <a:srgbClr val="D5DAE1"/>
-                      </a:solidFill>
-                      <a:prstDash val="solid"/>
-                      <a:round/>
-                      <a:headEnd type="none" w="med" len="med"/>
-                      <a:tailEnd type="none" w="med" len="med"/>
-                    </a:lnR>
-                    <a:lnT w="9525" cap="flat" cmpd="sng" algn="ctr">
-                      <a:solidFill>
-                        <a:srgbClr val="D5DAE1"/>
-                      </a:solidFill>
-                      <a:prstDash val="solid"/>
-                      <a:round/>
-                      <a:headEnd type="none" w="med" len="med"/>
-                      <a:tailEnd type="none" w="med" len="med"/>
-                    </a:lnT>
-                    <a:lnB w="9525" cap="flat" cmpd="sng" algn="ctr">
-                      <a:solidFill>
-                        <a:srgbClr val="D5DAE1"/>
-                      </a:solidFill>
-                      <a:prstDash val="solid"/>
-                      <a:round/>
-                      <a:headEnd type="none" w="med" len="med"/>
-                      <a:tailEnd type="none" w="med" len="med"/>
-                    </a:lnB>
-                    <a:solidFill>
-                      <a:srgbClr val="F7F8FA"/>
-                    </a:solidFill>
-                  </a:tcPr>
-                </a:tc>
-                <a:tc>
-                  <a:txBody>
-                    <a:bodyPr/>
-                    <a:lstStyle/>
-                    <a:p>
-                      <a:pPr indent="0" marL="0">
-                        <a:buNone/>
-                      </a:pPr>
-                      <a:r>
-                        <a:rPr lang="en-US" sz="1200" dirty="0">
-                          <a:solidFill>
-                            <a:srgbClr val="26303F"/>
-                          </a:solidFill>
-                          <a:latin typeface="Calibri" pitchFamily="34" charset="0"/>
-                          <a:ea typeface="Calibri" pitchFamily="34" charset="-122"/>
-                          <a:cs typeface="Calibri" pitchFamily="34" charset="-120"/>
-                        </a:rPr>
-                        <a:t>minimal</a:t>
-                      </a:r>
-                      <a:endParaRPr lang="en-US" sz="1200" dirty="0">
-                        <a:latin typeface="Calibri" charset="0"/>
-                        <a:ea typeface="Calibri" charset="0"/>
-                        <a:cs typeface="Calibri" charset="0"/>
-                      </a:endParaRPr>
-                    </a:p>
-                  </a:txBody>
-                  <a:tcPr marL="76200" marR="76200" marT="25400" marB="25400" anchor="ctr">
-                    <a:lnL w="9525" cap="flat" cmpd="sng" algn="ctr">
-                      <a:solidFill>
-                        <a:srgbClr val="D5DAE1"/>
-                      </a:solidFill>
-                      <a:prstDash val="solid"/>
-                      <a:round/>
-                      <a:headEnd type="none" w="med" len="med"/>
-                      <a:tailEnd type="none" w="med" len="med"/>
-                    </a:lnL>
-                    <a:lnR w="9525" cap="flat" cmpd="sng" algn="ctr">
-                      <a:solidFill>
-                        <a:srgbClr val="D5DAE1"/>
-                      </a:solidFill>
-                      <a:prstDash val="solid"/>
-                      <a:round/>
-                      <a:headEnd type="none" w="med" len="med"/>
-                      <a:tailEnd type="none" w="med" len="med"/>
-                    </a:lnR>
-                    <a:lnT w="9525" cap="flat" cmpd="sng" algn="ctr">
-                      <a:solidFill>
-                        <a:srgbClr val="D5DAE1"/>
-                      </a:solidFill>
-                      <a:prstDash val="solid"/>
-                      <a:round/>
-                      <a:headEnd type="none" w="med" len="med"/>
-                      <a:tailEnd type="none" w="med" len="med"/>
-                    </a:lnT>
-                    <a:lnB w="9525" cap="flat" cmpd="sng" algn="ctr">
-                      <a:solidFill>
-                        <a:srgbClr val="D5DAE1"/>
-                      </a:solidFill>
-                      <a:prstDash val="solid"/>
-                      <a:round/>
-                      <a:headEnd type="none" w="med" len="med"/>
-                      <a:tailEnd type="none" w="med" len="med"/>
-                    </a:lnB>
-                    <a:solidFill>
-                      <a:srgbClr val="F7F8FA"/>
-                    </a:solidFill>
-                  </a:tcPr>
-                </a:tc>
-                <a:tc>
-                  <a:txBody>
-                    <a:bodyPr/>
-                    <a:lstStyle/>
-                    <a:p>
-                      <a:pPr indent="0" marL="0">
-                        <a:buNone/>
-                      </a:pPr>
-                      <a:r>
-                        <a:rPr lang="en-US" sz="1200" dirty="0">
-                          <a:solidFill>
-                            <a:srgbClr val="26303F"/>
-                          </a:solidFill>
-                          <a:latin typeface="Calibri" pitchFamily="34" charset="0"/>
-                          <a:ea typeface="Calibri" pitchFamily="34" charset="-122"/>
-                          <a:cs typeface="Calibri" pitchFamily="34" charset="-120"/>
-                        </a:rPr>
-                        <a:t>workflow rules</a:t>
-                      </a:r>
-                      <a:endParaRPr lang="en-US" sz="1200" dirty="0">
-                        <a:latin typeface="Calibri" charset="0"/>
-                        <a:ea typeface="Calibri" charset="0"/>
-                        <a:cs typeface="Calibri" charset="0"/>
-                      </a:endParaRPr>
-                    </a:p>
-                  </a:txBody>
-                  <a:tcPr marL="76200" marR="76200" marT="25400" marB="25400" anchor="ctr">
-                    <a:lnL w="9525" cap="flat" cmpd="sng" algn="ctr">
-                      <a:solidFill>
-                        <a:srgbClr val="D5DAE1"/>
-                      </a:solidFill>
-                      <a:prstDash val="solid"/>
-                      <a:round/>
-                      <a:headEnd type="none" w="med" len="med"/>
-                      <a:tailEnd type="none" w="med" len="med"/>
-                    </a:lnL>
-                    <a:lnR w="9525" cap="flat" cmpd="sng" algn="ctr">
-                      <a:solidFill>
-                        <a:srgbClr val="D5DAE1"/>
-                      </a:solidFill>
-                      <a:prstDash val="solid"/>
-                      <a:round/>
-                      <a:headEnd type="none" w="med" len="med"/>
-                      <a:tailEnd type="none" w="med" len="med"/>
-                    </a:lnR>
-                    <a:lnT w="9525" cap="flat" cmpd="sng" algn="ctr">
-                      <a:solidFill>
-                        <a:srgbClr val="D5DAE1"/>
-                      </a:solidFill>
-                      <a:prstDash val="solid"/>
-                      <a:round/>
-                      <a:headEnd type="none" w="med" len="med"/>
-                      <a:tailEnd type="none" w="med" len="med"/>
-                    </a:lnT>
-                    <a:lnB w="9525" cap="flat" cmpd="sng" algn="ctr">
-                      <a:solidFill>
-                        <a:srgbClr val="D5DAE1"/>
-                      </a:solidFill>
-                      <a:prstDash val="solid"/>
-                      <a:round/>
-                      <a:headEnd type="none" w="med" len="med"/>
-                      <a:tailEnd type="none" w="med" len="med"/>
-                    </a:lnB>
-                    <a:solidFill>
-                      <a:srgbClr val="F7F8FA"/>
-                    </a:solidFill>
-                  </a:tcPr>
-                </a:tc>
-                <a:tc>
-                  <a:txBody>
-                    <a:bodyPr/>
-                    <a:lstStyle/>
-                    <a:p>
-                      <a:pPr indent="0" marL="0">
-                        <a:buNone/>
-                      </a:pPr>
-                      <a:r>
-                        <a:rPr lang="en-US" sz="1200" dirty="0">
-                          <a:solidFill>
-                            <a:srgbClr val="26303F"/>
-                          </a:solidFill>
-                          <a:latin typeface="Calibri" pitchFamily="34" charset="0"/>
-                          <a:ea typeface="Calibri" pitchFamily="34" charset="-122"/>
-                          <a:cs typeface="Calibri" pitchFamily="34" charset="-120"/>
-                        </a:rPr>
-                        <a:t>none</a:t>
-                      </a:r>
-                      <a:endParaRPr lang="en-US" sz="1200" dirty="0">
-                        <a:latin typeface="Calibri" charset="0"/>
-                        <a:ea typeface="Calibri" charset="0"/>
-                        <a:cs typeface="Calibri" charset="0"/>
-                      </a:endParaRPr>
-                    </a:p>
-                  </a:txBody>
-                  <a:tcPr marL="76200" marR="76200" marT="25400" marB="25400" anchor="ctr">
-                    <a:lnL w="9525" cap="flat" cmpd="sng" algn="ctr">
-                      <a:solidFill>
-                        <a:srgbClr val="D5DAE1"/>
-                      </a:solidFill>
-                      <a:prstDash val="solid"/>
-                      <a:round/>
-                      <a:headEnd type="none" w="med" len="med"/>
-                      <a:tailEnd type="none" w="med" len="med"/>
-                    </a:lnL>
-                    <a:lnR w="9525" cap="flat" cmpd="sng" algn="ctr">
-                      <a:solidFill>
-                        <a:srgbClr val="D5DAE1"/>
-                      </a:solidFill>
-                      <a:prstDash val="solid"/>
-                      <a:round/>
-                      <a:headEnd type="none" w="med" len="med"/>
-                      <a:tailEnd type="none" w="med" len="med"/>
-                    </a:lnR>
-                    <a:lnT w="9525" cap="flat" cmpd="sng" algn="ctr">
-                      <a:solidFill>
-                        <a:srgbClr val="D5DAE1"/>
-                      </a:solidFill>
-                      <a:prstDash val="solid"/>
-                      <a:round/>
-                      <a:headEnd type="none" w="med" len="med"/>
-                      <a:tailEnd type="none" w="med" len="med"/>
-                    </a:lnT>
-                    <a:lnB w="9525" cap="flat" cmpd="sng" algn="ctr">
-                      <a:solidFill>
-                        <a:srgbClr val="D5DAE1"/>
-                      </a:solidFill>
-                      <a:prstDash val="solid"/>
-                      <a:round/>
-                      <a:headEnd type="none" w="med" len="med"/>
-                      <a:tailEnd type="none" w="med" len="med"/>
-                    </a:lnB>
-                    <a:solidFill>
-                      <a:srgbClr val="F7F8FA"/>
-                    </a:solidFill>
-                  </a:tcPr>
-                </a:tc>
-                <a:tc>
-                  <a:txBody>
-                    <a:bodyPr/>
-                    <a:lstStyle/>
-                    <a:p>
-                      <a:pPr indent="0" marL="0">
-                        <a:buNone/>
-                      </a:pPr>
-                      <a:r>
-                        <a:rPr lang="en-US" sz="1200" dirty="0">
-                          <a:solidFill>
-                            <a:srgbClr val="26303F"/>
-                          </a:solidFill>
-                          <a:latin typeface="Calibri" pitchFamily="34" charset="0"/>
-                          <a:ea typeface="Calibri" pitchFamily="34" charset="-122"/>
-                          <a:cs typeface="Calibri" pitchFamily="34" charset="-120"/>
-                        </a:rPr>
-                        <a:t>paid module only</a:t>
-                      </a:r>
-                      <a:endParaRPr lang="en-US" sz="1200" dirty="0">
-                        <a:latin typeface="Calibri" charset="0"/>
-                        <a:ea typeface="Calibri" charset="0"/>
-                        <a:cs typeface="Calibri" charset="0"/>
-                      </a:endParaRPr>
-                    </a:p>
-                  </a:txBody>
-                  <a:tcPr marL="76200" marR="76200" marT="25400" marB="25400" anchor="ctr">
-                    <a:lnL w="9525" cap="flat" cmpd="sng" algn="ctr">
-                      <a:solidFill>
-                        <a:srgbClr val="D5DAE1"/>
-                      </a:solidFill>
-                      <a:prstDash val="solid"/>
-                      <a:round/>
-                      <a:headEnd type="none" w="med" len="med"/>
-                      <a:tailEnd type="none" w="med" len="med"/>
-                    </a:lnL>
-                    <a:lnR w="9525" cap="flat" cmpd="sng" algn="ctr">
-                      <a:solidFill>
-                        <a:srgbClr val="D5DAE1"/>
-                      </a:solidFill>
-                      <a:prstDash val="solid"/>
-                      <a:round/>
-                      <a:headEnd type="none" w="med" len="med"/>
-                      <a:tailEnd type="none" w="med" len="med"/>
-                    </a:lnR>
-                    <a:lnT w="9525" cap="flat" cmpd="sng" algn="ctr">
-                      <a:solidFill>
-                        <a:srgbClr val="D5DAE1"/>
-                      </a:solidFill>
-                      <a:prstDash val="solid"/>
-                      <a:round/>
-                      <a:headEnd type="none" w="med" len="med"/>
-                      <a:tailEnd type="none" w="med" len="med"/>
-                    </a:lnT>
-                    <a:lnB w="9525" cap="flat" cmpd="sng" algn="ctr">
-                      <a:solidFill>
-                        <a:srgbClr val="D5DAE1"/>
-                      </a:solidFill>
-                      <a:prstDash val="solid"/>
-                      <a:round/>
-                      <a:headEnd type="none" w="med" len="med"/>
-                      <a:tailEnd type="none" w="med" len="med"/>
-                    </a:lnB>
-                    <a:solidFill>
-                      <a:srgbClr val="F7F8FA"/>
-                    </a:solidFill>
-                  </a:tcPr>
-                </a:tc>
-              </a:tr>
-            </a:tbl>
-          </a:graphicData>
-        </a:graphic>
-      </p:graphicFrame>
-      <p:sp>
-        <p:nvSpPr>
-          <p:cNvPr id="13" name="Text 9"/>
-          <p:cNvSpPr/>
-          <p:nvPr/>
-        </p:nvSpPr>
-        <p:spPr>
-          <a:xfrm>
-            <a:off x="5486400" y="4434840"/>
-            <a:ext cx="6153912" cy="1737360"/>
-          </a:xfrm>
-          <a:prstGeom prst="rect">
-            <a:avLst/>
-          </a:prstGeom>
-          <a:noFill/>
-          <a:ln/>
-        </p:spPr>
-        <p:txBody>
-          <a:bodyPr wrap="square" lIns="0" tIns="0" rIns="0" bIns="0" rtlCol="0" anchor="t"/>
-          <a:lstStyle/>
-          <a:p>
-            <a:pPr indent="0" marL="0">
-              <a:lnSpc>
-                <a:spcPct val="105000"/>
-              </a:lnSpc>
-              <a:buNone/>
-            </a:pPr>
-            <a:r>
-              <a:rPr lang="en-US" sz="1450" dirty="0">
-                <a:solidFill>
-                  <a:srgbClr val="14213D"/>
-                </a:solidFill>
-                <a:latin typeface="Georgia" pitchFamily="34" charset="0"/>
-                <a:ea typeface="Georgia" pitchFamily="34" charset="-122"/>
-                <a:cs typeface="Georgia" pitchFamily="34" charset="-120"/>
-              </a:rPr>
-              <a:t>What is missing. </a:t>
-            </a:r>
-            <a:r>
-              <a:rPr lang="en-US" sz="1450" dirty="0">
-                <a:solidFill>
-                  <a:srgbClr val="26303F"/>
-                </a:solidFill>
-                <a:latin typeface="Calibri" pitchFamily="34" charset="0"/>
-                <a:ea typeface="Calibri" pitchFamily="34" charset="-122"/>
-                <a:cs typeface="Calibri" pitchFamily="34" charset="-120"/>
-              </a:rPr>
-              <a:t>Only GLPI computes priority, and without waiting time. None of them assigns by workload and skills, and none detects duplicates automatically. Machine-learning approaches in the literature need labelled history and are hard to explain, so a transparent baseline is a reasonable place to start.</a:t>
-            </a:r>
-            <a:endParaRPr lang="en-US" sz="1450" dirty="0"/>
           </a:p>
         </p:txBody>
       </p:sp>
@@ -20264,7 +17096,7 @@
       </p:sp>
       <p:graphicFrame>
         <p:nvGraphicFramePr>
-          <p:cNvPr id="8" name="Table 0"/>
+          <p:cNvPr id="1000" name="Table 0"/>
           <p:cNvGraphicFramePr>
             <a:graphicFrameLocks noGrp="1"/>
           </p:cNvGraphicFramePr>
@@ -20278,15 +17110,15 @@
         </p:nvGraphicFramePr>
         <p:xfrm>
           <a:off x="548640" y="1828800"/>
-          <a:ext cx="6172200" cy="914400"/>
+          <a:ext cx="11091672" cy="914400"/>
         </p:xfrm>
         <a:graphic>
           <a:graphicData uri="http://schemas.openxmlformats.org/drawingml/2006/table">
             <a:tbl>
               <a:tblPr/>
               <a:tblGrid>
-                <a:gridCol w="1737360"/>
-                <a:gridCol w="4434840"/>
+                <a:gridCol w="3122100"/>
+                <a:gridCol w="7969572"/>
               </a:tblGrid>
               <a:tr h="338328">
                 <a:tc>
@@ -21672,94 +18504,6 @@
           </a:graphicData>
         </a:graphic>
       </p:graphicFrame>
-      <p:sp>
-        <p:nvSpPr>
-          <p:cNvPr id="10" name="Shape 6"/>
-          <p:cNvSpPr/>
-          <p:nvPr/>
-        </p:nvSpPr>
-        <p:spPr>
-          <a:xfrm>
-            <a:off x="7371452" y="1792224"/>
-            <a:ext cx="3892568" cy="3227832"/>
-          </a:xfrm>
-          <a:prstGeom prst="rect">
-            <a:avLst/>
-          </a:prstGeom>
-          <a:solidFill>
-            <a:srgbClr val="FFFFFF"/>
-          </a:solidFill>
-          <a:ln w="9525">
-            <a:solidFill>
-              <a:srgbClr val="D5DAE1"/>
-            </a:solidFill>
-            <a:prstDash val="solid"/>
-          </a:ln>
-        </p:spPr>
-      </p:sp>
-      <p:pic>
-        <p:nvPicPr>
-          <p:cNvPr id="11" name="Image 0" descr="/home/subham/Projects/college/fyp/smart-helpdesk/report/university/figures/uc-01.png">    </p:cNvPr>
-          <p:cNvPicPr>
-            <a:picLocks noChangeAspect="1"/>
-          </p:cNvPicPr>
-          <p:nvPr/>
-        </p:nvPicPr>
-        <p:blipFill>
-          <a:blip r:embed="rId1"/>
-          <a:stretch>
-            <a:fillRect/>
-          </a:stretch>
-        </p:blipFill>
-        <p:spPr>
-          <a:xfrm>
-            <a:off x="7408028" y="1828800"/>
-            <a:ext cx="3819416" cy="3154680"/>
-          </a:xfrm>
-          <a:prstGeom prst="rect">
-            <a:avLst/>
-          </a:prstGeom>
-        </p:spPr>
-      </p:pic>
-      <p:sp>
-        <p:nvSpPr>
-          <p:cNvPr id="12" name="Text 7"/>
-          <p:cNvSpPr/>
-          <p:nvPr/>
-        </p:nvSpPr>
-        <p:spPr>
-          <a:xfrm>
-            <a:off x="6995160" y="5074920"/>
-            <a:ext cx="4645152" cy="274320"/>
-          </a:xfrm>
-          <a:prstGeom prst="rect">
-            <a:avLst/>
-          </a:prstGeom>
-          <a:noFill/>
-          <a:ln/>
-        </p:spPr>
-        <p:txBody>
-          <a:bodyPr wrap="square" lIns="0" tIns="0" rIns="0" bIns="0" rtlCol="0" anchor="ctr"/>
-          <a:lstStyle/>
-          <a:p>
-            <a:pPr algn="ctr" indent="0" marL="0">
-              <a:buNone/>
-            </a:pPr>
-            <a:r>
-              <a:rPr lang="en-US" sz="1100" i="1" dirty="0">
-                <a:solidFill>
-                  <a:srgbClr val="66707F"/>
-                </a:solidFill>
-                <a:latin typeface="Calibri" pitchFamily="34" charset="0"/>
-                <a:ea typeface="Calibri" pitchFamily="34" charset="-122"/>
-                <a:cs typeface="Calibri" pitchFamily="34" charset="-120"/>
-              </a:rPr>
-              <a:t>Figure 3.1: Use cases of ticket handling and automation</a:t>
-            </a:r>
-            <a:endParaRPr lang="en-US" sz="1100" dirty="0"/>
-          </a:p>
-        </p:txBody>
-      </p:sp>
       <p:sp>
         <p:nvSpPr>
           <p:cNvPr id="13" name="Text 8"/>
